--- a/docs/guardian_layer_internal.pptx
+++ b/docs/guardian_layer_internal.pptx
@@ -3672,7 +3672,7 @@
                 </a:solidFill>
                 <a:latin typeface="Georgia"/>
               </a:rPr>
-              <a:t>This is the client-facing win — solid across 9 tools and 7 datasets.</a:t>
+              <a:t>This is the client-facing win — solid across all 11 tools and 7 datasets.</a:t>
             </a:r>
           </a:p>
         </p:txBody>

--- a/docs/guardian_layer_internal.pptx
+++ b/docs/guardian_layer_internal.pptx
@@ -10,6 +10,7 @@
     <p:sldId id="258" r:id="rId9"/>
     <p:sldId id="259" r:id="rId10"/>
     <p:sldId id="260" r:id="rId11"/>
+    <p:sldId id="261" r:id="rId12"/>
   </p:sldIdLst>
   <p:sldSz cx="12191695" cy="6858000" type="screen4x3"/>
   <p:notesSz cx="6858000" cy="9144000"/>
@@ -3776,7 +3777,7 @@
                 </a:solidFill>
                 <a:latin typeface="Consolas"/>
               </a:rPr>
-              <a:t>02 · THE HONEST GAP — HOW MUCH DOES IT HIDE?</a:t>
+              <a:t>02 · IS THE CHANGE SIGNIFICANT?</a:t>
             </a:r>
           </a:p>
         </p:txBody>
@@ -3833,8 +3834,8 @@
         </p:nvSpPr>
         <p:spPr>
           <a:xfrm>
-            <a:off x="640080" y="1234440"/>
-            <a:ext cx="10881360" cy="640080"/>
+            <a:off x="640080" y="1828800"/>
+            <a:ext cx="4937760" cy="2743200"/>
           </a:xfrm>
           <a:prstGeom prst="rect">
             <a:avLst/>
@@ -3846,6 +3847,25 @@
             <a:spAutoFit/>
           </a:bodyPr>
           <a:lstStyle/>
+          <a:p>
+            <a:pPr algn="l">
+              <a:spcBef>
+                <a:spcPts val="0"/>
+              </a:spcBef>
+              <a:spcAft>
+                <a:spcPts val="800"/>
+              </a:spcAft>
+            </a:pPr>
+            <a:r>
+              <a:rPr sz="7800" b="1" i="0">
+                <a:solidFill>
+                  <a:srgbClr val="0F6E5C"/>
+                </a:solidFill>
+                <a:latin typeface="Consolas"/>
+              </a:rPr>
+              <a:t>±2 pts</a:t>
+            </a:r>
+          </a:p>
           <a:p>
             <a:pPr algn="l">
               <a:spcBef>
@@ -3856,13 +3876,13 @@
               </a:spcAft>
             </a:pPr>
             <a:r>
-              <a:rPr sz="1900" b="1" i="0">
-                <a:solidFill>
-                  <a:srgbClr val="18211E"/>
-                </a:solidFill>
-                <a:latin typeface="Georgia"/>
+              <a:rPr sz="1200" b="1" i="0">
+                <a:solidFill>
+                  <a:srgbClr val="5C6B64"/>
+                </a:solidFill>
+                <a:latin typeface="Consolas"/>
               </a:rPr>
-              <a:t>On real medical records, it hides names and dates well — but misses about half of ID numbers and addresses.</a:t>
+              <a:t>PROVEN-EQUIVALENT MARGIN (TOST, p≈1e-8)</a:t>
             </a:r>
           </a:p>
         </p:txBody>
@@ -3875,8 +3895,8 @@
         </p:nvSpPr>
         <p:spPr>
           <a:xfrm>
-            <a:off x="822960" y="2286000"/>
-            <a:ext cx="4206240" cy="365760"/>
+            <a:off x="5852160" y="1828800"/>
+            <a:ext cx="5669280" cy="3108960"/>
           </a:xfrm>
           <a:prstGeom prst="rect">
             <a:avLst/>
@@ -3888,6 +3908,44 @@
             <a:spAutoFit/>
           </a:bodyPr>
           <a:lstStyle/>
+          <a:p>
+            <a:pPr algn="l">
+              <a:spcBef>
+                <a:spcPts val="0"/>
+              </a:spcBef>
+              <a:spcAft>
+                <a:spcPts val="1200"/>
+              </a:spcAft>
+            </a:pPr>
+            <a:r>
+              <a:rPr sz="2400" b="1" i="0">
+                <a:solidFill>
+                  <a:srgbClr val="18211E"/>
+                </a:solidFill>
+                <a:latin typeface="Georgia"/>
+              </a:rPr>
+              <a:t>Not a drop — statistically equivalent.</a:t>
+            </a:r>
+          </a:p>
+          <a:p>
+            <a:pPr algn="l">
+              <a:spcBef>
+                <a:spcPts val="0"/>
+              </a:spcBef>
+              <a:spcAft>
+                <a:spcPts val="1000"/>
+              </a:spcAft>
+            </a:pPr>
+            <a:r>
+              <a:rPr sz="1700" b="0" i="0">
+                <a:solidFill>
+                  <a:srgbClr val="18211E"/>
+                </a:solidFill>
+                <a:latin typeface="Georgia"/>
+              </a:rPr>
+              <a:t>On the 56,174 masked spans, detector recall is 76.2% → 75.0% (−1.2 pts). With 56k paired observations even a tiny shift trips a plain significance test, so we use an equivalence test instead.</a:t>
+            </a:r>
+          </a:p>
           <a:p>
             <a:pPr algn="l">
               <a:spcBef>
@@ -3898,659 +3956,13 @@
               </a:spcAft>
             </a:pPr>
             <a:r>
-              <a:rPr sz="1600" b="1" i="0">
-                <a:solidFill>
-                  <a:srgbClr val="18211E"/>
+              <a:rPr sz="1600" b="0" i="0">
+                <a:solidFill>
+                  <a:srgbClr val="5C6B64"/>
                 </a:solidFill>
                 <a:latin typeface="Georgia"/>
               </a:rPr>
-              <a:t>Names</a:t>
-            </a:r>
-          </a:p>
-        </p:txBody>
-      </p:sp>
-      <p:sp>
-        <p:nvSpPr>
-          <p:cNvPr id="7" name="Rectangle 6"/>
-          <p:cNvSpPr/>
-          <p:nvPr/>
-        </p:nvSpPr>
-        <p:spPr>
-          <a:xfrm>
-            <a:off x="5120640" y="2304288"/>
-            <a:ext cx="4206240" cy="292608"/>
-          </a:xfrm>
-          <a:prstGeom prst="rect">
-            <a:avLst/>
-          </a:prstGeom>
-          <a:solidFill>
-            <a:srgbClr val="D8DEDA"/>
-          </a:solidFill>
-          <a:ln>
-            <a:noFill/>
-          </a:ln>
-          <a:effectLst/>
-        </p:spPr>
-        <p:style>
-          <a:lnRef idx="1">
-            <a:schemeClr val="accent1"/>
-          </a:lnRef>
-          <a:fillRef idx="3">
-            <a:schemeClr val="accent1"/>
-          </a:fillRef>
-          <a:effectRef idx="2">
-            <a:schemeClr val="accent1"/>
-          </a:effectRef>
-          <a:fontRef idx="minor">
-            <a:schemeClr val="lt1"/>
-          </a:fontRef>
-        </p:style>
-        <p:txBody>
-          <a:bodyPr rtlCol="0" anchor="ctr"/>
-          <a:lstStyle/>
-          <a:p>
-            <a:pPr algn="ctr"/>
-          </a:p>
-        </p:txBody>
-      </p:sp>
-      <p:sp>
-        <p:nvSpPr>
-          <p:cNvPr id="8" name="Rectangle 7"/>
-          <p:cNvSpPr/>
-          <p:nvPr/>
-        </p:nvSpPr>
-        <p:spPr>
-          <a:xfrm>
-            <a:off x="5120640" y="2304288"/>
-            <a:ext cx="3154679" cy="292608"/>
-          </a:xfrm>
-          <a:prstGeom prst="rect">
-            <a:avLst/>
-          </a:prstGeom>
-          <a:solidFill>
-            <a:srgbClr val="0F6E5C"/>
-          </a:solidFill>
-          <a:ln>
-            <a:noFill/>
-          </a:ln>
-          <a:effectLst/>
-        </p:spPr>
-        <p:style>
-          <a:lnRef idx="1">
-            <a:schemeClr val="accent1"/>
-          </a:lnRef>
-          <a:fillRef idx="3">
-            <a:schemeClr val="accent1"/>
-          </a:fillRef>
-          <a:effectRef idx="2">
-            <a:schemeClr val="accent1"/>
-          </a:effectRef>
-          <a:fontRef idx="minor">
-            <a:schemeClr val="lt1"/>
-          </a:fontRef>
-        </p:style>
-        <p:txBody>
-          <a:bodyPr rtlCol="0" anchor="ctr"/>
-          <a:lstStyle/>
-          <a:p>
-            <a:pPr algn="ctr"/>
-          </a:p>
-        </p:txBody>
-      </p:sp>
-      <p:sp>
-        <p:nvSpPr>
-          <p:cNvPr id="9" name="TextBox 8"/>
-          <p:cNvSpPr txBox="1"/>
-          <p:nvPr/>
-        </p:nvSpPr>
-        <p:spPr>
-          <a:xfrm>
-            <a:off x="9601200" y="2286000"/>
-            <a:ext cx="2194560" cy="365760"/>
-          </a:xfrm>
-          <a:prstGeom prst="rect">
-            <a:avLst/>
-          </a:prstGeom>
-          <a:noFill/>
-        </p:spPr>
-        <p:txBody>
-          <a:bodyPr wrap="square" lIns="0" rIns="0" tIns="0" bIns="0">
-            <a:spAutoFit/>
-          </a:bodyPr>
-          <a:lstStyle/>
-          <a:p>
-            <a:pPr algn="l">
-              <a:spcBef>
-                <a:spcPts val="0"/>
-              </a:spcBef>
-              <a:spcAft>
-                <a:spcPts val="600"/>
-              </a:spcAft>
-            </a:pPr>
-            <a:r>
-              <a:rPr sz="1400" b="1" i="0">
-                <a:solidFill>
-                  <a:srgbClr val="0F6E5C"/>
-                </a:solidFill>
-                <a:latin typeface="Consolas"/>
-              </a:rPr>
-              <a:t>hides ~3 of 4</a:t>
-            </a:r>
-          </a:p>
-        </p:txBody>
-      </p:sp>
-      <p:sp>
-        <p:nvSpPr>
-          <p:cNvPr id="10" name="TextBox 9"/>
-          <p:cNvSpPr txBox="1"/>
-          <p:nvPr/>
-        </p:nvSpPr>
-        <p:spPr>
-          <a:xfrm>
-            <a:off x="822960" y="3127248"/>
-            <a:ext cx="4206240" cy="365760"/>
-          </a:xfrm>
-          <a:prstGeom prst="rect">
-            <a:avLst/>
-          </a:prstGeom>
-          <a:noFill/>
-        </p:spPr>
-        <p:txBody>
-          <a:bodyPr wrap="square" lIns="0" rIns="0" tIns="0" bIns="0">
-            <a:spAutoFit/>
-          </a:bodyPr>
-          <a:lstStyle/>
-          <a:p>
-            <a:pPr algn="l">
-              <a:spcBef>
-                <a:spcPts val="0"/>
-              </a:spcBef>
-              <a:spcAft>
-                <a:spcPts val="600"/>
-              </a:spcAft>
-            </a:pPr>
-            <a:r>
-              <a:rPr sz="1600" b="1" i="0">
-                <a:solidFill>
-                  <a:srgbClr val="18211E"/>
-                </a:solidFill>
-                <a:latin typeface="Georgia"/>
-              </a:rPr>
-              <a:t>Dates / ages</a:t>
-            </a:r>
-          </a:p>
-        </p:txBody>
-      </p:sp>
-      <p:sp>
-        <p:nvSpPr>
-          <p:cNvPr id="11" name="Rectangle 10"/>
-          <p:cNvSpPr/>
-          <p:nvPr/>
-        </p:nvSpPr>
-        <p:spPr>
-          <a:xfrm>
-            <a:off x="5120640" y="3145536"/>
-            <a:ext cx="4206240" cy="292608"/>
-          </a:xfrm>
-          <a:prstGeom prst="rect">
-            <a:avLst/>
-          </a:prstGeom>
-          <a:solidFill>
-            <a:srgbClr val="D8DEDA"/>
-          </a:solidFill>
-          <a:ln>
-            <a:noFill/>
-          </a:ln>
-          <a:effectLst/>
-        </p:spPr>
-        <p:style>
-          <a:lnRef idx="1">
-            <a:schemeClr val="accent1"/>
-          </a:lnRef>
-          <a:fillRef idx="3">
-            <a:schemeClr val="accent1"/>
-          </a:fillRef>
-          <a:effectRef idx="2">
-            <a:schemeClr val="accent1"/>
-          </a:effectRef>
-          <a:fontRef idx="minor">
-            <a:schemeClr val="lt1"/>
-          </a:fontRef>
-        </p:style>
-        <p:txBody>
-          <a:bodyPr rtlCol="0" anchor="ctr"/>
-          <a:lstStyle/>
-          <a:p>
-            <a:pPr algn="ctr"/>
-          </a:p>
-        </p:txBody>
-      </p:sp>
-      <p:sp>
-        <p:nvSpPr>
-          <p:cNvPr id="12" name="Rectangle 11"/>
-          <p:cNvSpPr/>
-          <p:nvPr/>
-        </p:nvSpPr>
-        <p:spPr>
-          <a:xfrm>
-            <a:off x="5120640" y="3145536"/>
-            <a:ext cx="3070555" cy="292608"/>
-          </a:xfrm>
-          <a:prstGeom prst="rect">
-            <a:avLst/>
-          </a:prstGeom>
-          <a:solidFill>
-            <a:srgbClr val="0F6E5C"/>
-          </a:solidFill>
-          <a:ln>
-            <a:noFill/>
-          </a:ln>
-          <a:effectLst/>
-        </p:spPr>
-        <p:style>
-          <a:lnRef idx="1">
-            <a:schemeClr val="accent1"/>
-          </a:lnRef>
-          <a:fillRef idx="3">
-            <a:schemeClr val="accent1"/>
-          </a:fillRef>
-          <a:effectRef idx="2">
-            <a:schemeClr val="accent1"/>
-          </a:effectRef>
-          <a:fontRef idx="minor">
-            <a:schemeClr val="lt1"/>
-          </a:fontRef>
-        </p:style>
-        <p:txBody>
-          <a:bodyPr rtlCol="0" anchor="ctr"/>
-          <a:lstStyle/>
-          <a:p>
-            <a:pPr algn="ctr"/>
-          </a:p>
-        </p:txBody>
-      </p:sp>
-      <p:sp>
-        <p:nvSpPr>
-          <p:cNvPr id="13" name="TextBox 12"/>
-          <p:cNvSpPr txBox="1"/>
-          <p:nvPr/>
-        </p:nvSpPr>
-        <p:spPr>
-          <a:xfrm>
-            <a:off x="9601200" y="3127248"/>
-            <a:ext cx="2194560" cy="365760"/>
-          </a:xfrm>
-          <a:prstGeom prst="rect">
-            <a:avLst/>
-          </a:prstGeom>
-          <a:noFill/>
-        </p:spPr>
-        <p:txBody>
-          <a:bodyPr wrap="square" lIns="0" rIns="0" tIns="0" bIns="0">
-            <a:spAutoFit/>
-          </a:bodyPr>
-          <a:lstStyle/>
-          <a:p>
-            <a:pPr algn="l">
-              <a:spcBef>
-                <a:spcPts val="0"/>
-              </a:spcBef>
-              <a:spcAft>
-                <a:spcPts val="600"/>
-              </a:spcAft>
-            </a:pPr>
-            <a:r>
-              <a:rPr sz="1400" b="1" i="0">
-                <a:solidFill>
-                  <a:srgbClr val="0F6E5C"/>
-                </a:solidFill>
-                <a:latin typeface="Consolas"/>
-              </a:rPr>
-              <a:t>hides ~3 of 4</a:t>
-            </a:r>
-          </a:p>
-        </p:txBody>
-      </p:sp>
-      <p:sp>
-        <p:nvSpPr>
-          <p:cNvPr id="14" name="TextBox 13"/>
-          <p:cNvSpPr txBox="1"/>
-          <p:nvPr/>
-        </p:nvSpPr>
-        <p:spPr>
-          <a:xfrm>
-            <a:off x="822960" y="3968496"/>
-            <a:ext cx="4206240" cy="365760"/>
-          </a:xfrm>
-          <a:prstGeom prst="rect">
-            <a:avLst/>
-          </a:prstGeom>
-          <a:noFill/>
-        </p:spPr>
-        <p:txBody>
-          <a:bodyPr wrap="square" lIns="0" rIns="0" tIns="0" bIns="0">
-            <a:spAutoFit/>
-          </a:bodyPr>
-          <a:lstStyle/>
-          <a:p>
-            <a:pPr algn="l">
-              <a:spcBef>
-                <a:spcPts val="0"/>
-              </a:spcBef>
-              <a:spcAft>
-                <a:spcPts val="600"/>
-              </a:spcAft>
-            </a:pPr>
-            <a:r>
-              <a:rPr sz="1600" b="1" i="0">
-                <a:solidFill>
-                  <a:srgbClr val="18211E"/>
-                </a:solidFill>
-                <a:latin typeface="Georgia"/>
-              </a:rPr>
-              <a:t>ID numbers (patient ID, phone)</a:t>
-            </a:r>
-          </a:p>
-        </p:txBody>
-      </p:sp>
-      <p:sp>
-        <p:nvSpPr>
-          <p:cNvPr id="15" name="Rectangle 14"/>
-          <p:cNvSpPr/>
-          <p:nvPr/>
-        </p:nvSpPr>
-        <p:spPr>
-          <a:xfrm>
-            <a:off x="5120640" y="3986784"/>
-            <a:ext cx="4206240" cy="292608"/>
-          </a:xfrm>
-          <a:prstGeom prst="rect">
-            <a:avLst/>
-          </a:prstGeom>
-          <a:solidFill>
-            <a:srgbClr val="D8DEDA"/>
-          </a:solidFill>
-          <a:ln>
-            <a:noFill/>
-          </a:ln>
-          <a:effectLst/>
-        </p:spPr>
-        <p:style>
-          <a:lnRef idx="1">
-            <a:schemeClr val="accent1"/>
-          </a:lnRef>
-          <a:fillRef idx="3">
-            <a:schemeClr val="accent1"/>
-          </a:fillRef>
-          <a:effectRef idx="2">
-            <a:schemeClr val="accent1"/>
-          </a:effectRef>
-          <a:fontRef idx="minor">
-            <a:schemeClr val="lt1"/>
-          </a:fontRef>
-        </p:style>
-        <p:txBody>
-          <a:bodyPr rtlCol="0" anchor="ctr"/>
-          <a:lstStyle/>
-          <a:p>
-            <a:pPr algn="ctr"/>
-          </a:p>
-        </p:txBody>
-      </p:sp>
-      <p:sp>
-        <p:nvSpPr>
-          <p:cNvPr id="16" name="Rectangle 15"/>
-          <p:cNvSpPr/>
-          <p:nvPr/>
-        </p:nvSpPr>
-        <p:spPr>
-          <a:xfrm>
-            <a:off x="5120640" y="3986784"/>
-            <a:ext cx="2145182" cy="292608"/>
-          </a:xfrm>
-          <a:prstGeom prst="rect">
-            <a:avLst/>
-          </a:prstGeom>
-          <a:solidFill>
-            <a:srgbClr val="BD5B36"/>
-          </a:solidFill>
-          <a:ln>
-            <a:noFill/>
-          </a:ln>
-          <a:effectLst/>
-        </p:spPr>
-        <p:style>
-          <a:lnRef idx="1">
-            <a:schemeClr val="accent1"/>
-          </a:lnRef>
-          <a:fillRef idx="3">
-            <a:schemeClr val="accent1"/>
-          </a:fillRef>
-          <a:effectRef idx="2">
-            <a:schemeClr val="accent1"/>
-          </a:effectRef>
-          <a:fontRef idx="minor">
-            <a:schemeClr val="lt1"/>
-          </a:fontRef>
-        </p:style>
-        <p:txBody>
-          <a:bodyPr rtlCol="0" anchor="ctr"/>
-          <a:lstStyle/>
-          <a:p>
-            <a:pPr algn="ctr"/>
-          </a:p>
-        </p:txBody>
-      </p:sp>
-      <p:sp>
-        <p:nvSpPr>
-          <p:cNvPr id="17" name="TextBox 16"/>
-          <p:cNvSpPr txBox="1"/>
-          <p:nvPr/>
-        </p:nvSpPr>
-        <p:spPr>
-          <a:xfrm>
-            <a:off x="9601200" y="3968496"/>
-            <a:ext cx="2194560" cy="365760"/>
-          </a:xfrm>
-          <a:prstGeom prst="rect">
-            <a:avLst/>
-          </a:prstGeom>
-          <a:noFill/>
-        </p:spPr>
-        <p:txBody>
-          <a:bodyPr wrap="square" lIns="0" rIns="0" tIns="0" bIns="0">
-            <a:spAutoFit/>
-          </a:bodyPr>
-          <a:lstStyle/>
-          <a:p>
-            <a:pPr algn="l">
-              <a:spcBef>
-                <a:spcPts val="0"/>
-              </a:spcBef>
-              <a:spcAft>
-                <a:spcPts val="600"/>
-              </a:spcAft>
-            </a:pPr>
-            <a:r>
-              <a:rPr sz="1400" b="1" i="0">
-                <a:solidFill>
-                  <a:srgbClr val="BD5B36"/>
-                </a:solidFill>
-                <a:latin typeface="Consolas"/>
-              </a:rPr>
-              <a:t>hides ~1 of 2</a:t>
-            </a:r>
-          </a:p>
-        </p:txBody>
-      </p:sp>
-      <p:sp>
-        <p:nvSpPr>
-          <p:cNvPr id="18" name="TextBox 17"/>
-          <p:cNvSpPr txBox="1"/>
-          <p:nvPr/>
-        </p:nvSpPr>
-        <p:spPr>
-          <a:xfrm>
-            <a:off x="822960" y="4809744"/>
-            <a:ext cx="4206240" cy="365760"/>
-          </a:xfrm>
-          <a:prstGeom prst="rect">
-            <a:avLst/>
-          </a:prstGeom>
-          <a:noFill/>
-        </p:spPr>
-        <p:txBody>
-          <a:bodyPr wrap="square" lIns="0" rIns="0" tIns="0" bIns="0">
-            <a:spAutoFit/>
-          </a:bodyPr>
-          <a:lstStyle/>
-          <a:p>
-            <a:pPr algn="l">
-              <a:spcBef>
-                <a:spcPts val="0"/>
-              </a:spcBef>
-              <a:spcAft>
-                <a:spcPts val="600"/>
-              </a:spcAft>
-            </a:pPr>
-            <a:r>
-              <a:rPr sz="1600" b="1" i="0">
-                <a:solidFill>
-                  <a:srgbClr val="18211E"/>
-                </a:solidFill>
-                <a:latin typeface="Georgia"/>
-              </a:rPr>
-              <a:t>Addresses / places</a:t>
-            </a:r>
-          </a:p>
-        </p:txBody>
-      </p:sp>
-      <p:sp>
-        <p:nvSpPr>
-          <p:cNvPr id="19" name="Rectangle 18"/>
-          <p:cNvSpPr/>
-          <p:nvPr/>
-        </p:nvSpPr>
-        <p:spPr>
-          <a:xfrm>
-            <a:off x="5120640" y="4828032"/>
-            <a:ext cx="4206240" cy="292608"/>
-          </a:xfrm>
-          <a:prstGeom prst="rect">
-            <a:avLst/>
-          </a:prstGeom>
-          <a:solidFill>
-            <a:srgbClr val="D8DEDA"/>
-          </a:solidFill>
-          <a:ln>
-            <a:noFill/>
-          </a:ln>
-          <a:effectLst/>
-        </p:spPr>
-        <p:style>
-          <a:lnRef idx="1">
-            <a:schemeClr val="accent1"/>
-          </a:lnRef>
-          <a:fillRef idx="3">
-            <a:schemeClr val="accent1"/>
-          </a:fillRef>
-          <a:effectRef idx="2">
-            <a:schemeClr val="accent1"/>
-          </a:effectRef>
-          <a:fontRef idx="minor">
-            <a:schemeClr val="lt1"/>
-          </a:fontRef>
-        </p:style>
-        <p:txBody>
-          <a:bodyPr rtlCol="0" anchor="ctr"/>
-          <a:lstStyle/>
-          <a:p>
-            <a:pPr algn="ctr"/>
-          </a:p>
-        </p:txBody>
-      </p:sp>
-      <p:sp>
-        <p:nvSpPr>
-          <p:cNvPr id="20" name="Rectangle 19"/>
-          <p:cNvSpPr/>
-          <p:nvPr/>
-        </p:nvSpPr>
-        <p:spPr>
-          <a:xfrm>
-            <a:off x="5120640" y="4828032"/>
-            <a:ext cx="1850745" cy="292608"/>
-          </a:xfrm>
-          <a:prstGeom prst="rect">
-            <a:avLst/>
-          </a:prstGeom>
-          <a:solidFill>
-            <a:srgbClr val="BD5B36"/>
-          </a:solidFill>
-          <a:ln>
-            <a:noFill/>
-          </a:ln>
-          <a:effectLst/>
-        </p:spPr>
-        <p:style>
-          <a:lnRef idx="1">
-            <a:schemeClr val="accent1"/>
-          </a:lnRef>
-          <a:fillRef idx="3">
-            <a:schemeClr val="accent1"/>
-          </a:fillRef>
-          <a:effectRef idx="2">
-            <a:schemeClr val="accent1"/>
-          </a:effectRef>
-          <a:fontRef idx="minor">
-            <a:schemeClr val="lt1"/>
-          </a:fontRef>
-        </p:style>
-        <p:txBody>
-          <a:bodyPr rtlCol="0" anchor="ctr"/>
-          <a:lstStyle/>
-          <a:p>
-            <a:pPr algn="ctr"/>
-          </a:p>
-        </p:txBody>
-      </p:sp>
-      <p:sp>
-        <p:nvSpPr>
-          <p:cNvPr id="21" name="TextBox 20"/>
-          <p:cNvSpPr txBox="1"/>
-          <p:nvPr/>
-        </p:nvSpPr>
-        <p:spPr>
-          <a:xfrm>
-            <a:off x="9601200" y="4809744"/>
-            <a:ext cx="2194560" cy="365760"/>
-          </a:xfrm>
-          <a:prstGeom prst="rect">
-            <a:avLst/>
-          </a:prstGeom>
-          <a:noFill/>
-        </p:spPr>
-        <p:txBody>
-          <a:bodyPr wrap="square" lIns="0" rIns="0" tIns="0" bIns="0">
-            <a:spAutoFit/>
-          </a:bodyPr>
-          <a:lstStyle/>
-          <a:p>
-            <a:pPr algn="l">
-              <a:spcBef>
-                <a:spcPts val="0"/>
-              </a:spcBef>
-              <a:spcAft>
-                <a:spcPts val="600"/>
-              </a:spcAft>
-            </a:pPr>
-            <a:r>
-              <a:rPr sz="1400" b="1" i="0">
-                <a:solidFill>
-                  <a:srgbClr val="BD5B36"/>
-                </a:solidFill>
-                <a:latin typeface="Consolas"/>
-              </a:rPr>
-              <a:t>hides ~1 of 2</a:t>
+              <a:t>It confirms the change is statistically equivalent to zero within ±2 points — provably too small to matter, not merely “not significant.”</a:t>
             </a:r>
           </a:p>
         </p:txBody>
@@ -4654,7 +4066,7 @@
                 </a:solidFill>
                 <a:latin typeface="Consolas"/>
               </a:rPr>
-              <a:t>03 · THE GOOD NEWS ABOUT THE GAP</a:t>
+              <a:t>03 · THE HONEST GAP — HOW MUCH DOES IT HIDE?</a:t>
             </a:r>
           </a:p>
         </p:txBody>
@@ -4711,8 +4123,8 @@
         </p:nvSpPr>
         <p:spPr>
           <a:xfrm>
-            <a:off x="640080" y="1828800"/>
-            <a:ext cx="4937760" cy="2743200"/>
+            <a:off x="640080" y="1234440"/>
+            <a:ext cx="10881360" cy="640080"/>
           </a:xfrm>
           <a:prstGeom prst="rect">
             <a:avLst/>
@@ -4724,25 +4136,6 @@
             <a:spAutoFit/>
           </a:bodyPr>
           <a:lstStyle/>
-          <a:p>
-            <a:pPr algn="l">
-              <a:spcBef>
-                <a:spcPts val="0"/>
-              </a:spcBef>
-              <a:spcAft>
-                <a:spcPts val="800"/>
-              </a:spcAft>
-            </a:pPr>
-            <a:r>
-              <a:rPr sz="7800" b="1" i="0">
-                <a:solidFill>
-                  <a:srgbClr val="0F6E5C"/>
-                </a:solidFill>
-                <a:latin typeface="Consolas"/>
-              </a:rPr>
-              <a:t>~3 in 4</a:t>
-            </a:r>
-          </a:p>
           <a:p>
             <a:pPr algn="l">
               <a:spcBef>
@@ -4753,13 +4146,13 @@
               </a:spcAft>
             </a:pPr>
             <a:r>
-              <a:rPr sz="1200" b="1" i="0">
-                <a:solidFill>
-                  <a:srgbClr val="5C6B64"/>
-                </a:solidFill>
-                <a:latin typeface="Consolas"/>
+              <a:rPr sz="1900" b="1" i="0">
+                <a:solidFill>
+                  <a:srgbClr val="18211E"/>
+                </a:solidFill>
+                <a:latin typeface="Georgia"/>
               </a:rPr>
-              <a:t>OF THE MISSES, THE TOOL ALREADY KNEW IT WAS PRIVATE</a:t>
+              <a:t>On real medical records, it hides names and dates well — but misses about half of ID numbers and addresses.</a:t>
             </a:r>
           </a:p>
         </p:txBody>
@@ -4772,8 +4165,8 @@
         </p:nvSpPr>
         <p:spPr>
           <a:xfrm>
-            <a:off x="5852160" y="1920240"/>
-            <a:ext cx="5669280" cy="2926080"/>
+            <a:off x="822960" y="2286000"/>
+            <a:ext cx="4206240" cy="365760"/>
           </a:xfrm>
           <a:prstGeom prst="rect">
             <a:avLst/>
@@ -4785,44 +4178,6 @@
             <a:spAutoFit/>
           </a:bodyPr>
           <a:lstStyle/>
-          <a:p>
-            <a:pPr algn="l">
-              <a:spcBef>
-                <a:spcPts val="0"/>
-              </a:spcBef>
-              <a:spcAft>
-                <a:spcPts val="1400"/>
-              </a:spcAft>
-            </a:pPr>
-            <a:r>
-              <a:rPr sz="2400" b="1" i="0">
-                <a:solidFill>
-                  <a:srgbClr val="18211E"/>
-                </a:solidFill>
-                <a:latin typeface="Georgia"/>
-              </a:rPr>
-              <a:t>It's a swapping gap, not a finding gap.</a:t>
-            </a:r>
-          </a:p>
-          <a:p>
-            <a:pPr algn="l">
-              <a:spcBef>
-                <a:spcPts val="0"/>
-              </a:spcBef>
-              <a:spcAft>
-                <a:spcPts val="1000"/>
-              </a:spcAft>
-            </a:pPr>
-            <a:r>
-              <a:rPr sz="1800" b="0" i="0">
-                <a:solidFill>
-                  <a:srgbClr val="18211E"/>
-                </a:solidFill>
-                <a:latin typeface="Georgia"/>
-              </a:rPr>
-              <a:t>For most of what slips through, the tool had already flagged it as sensitive — it just didn't swap it. So the fix is in the swap step, not in teaching it what's private.</a:t>
-            </a:r>
-          </a:p>
           <a:p>
             <a:pPr algn="l">
               <a:spcBef>
@@ -4833,13 +4188,659 @@
               </a:spcAft>
             </a:pPr>
             <a:r>
-              <a:rPr sz="1500" b="0" i="0">
-                <a:solidFill>
-                  <a:srgbClr val="5C6B64"/>
+              <a:rPr sz="1600" b="1" i="0">
+                <a:solidFill>
+                  <a:srgbClr val="18211E"/>
                 </a:solidFill>
                 <a:latin typeface="Georgia"/>
               </a:rPr>
-              <a:t>That's the easier kind of problem to fix.</a:t>
+              <a:t>Names</a:t>
+            </a:r>
+          </a:p>
+        </p:txBody>
+      </p:sp>
+      <p:sp>
+        <p:nvSpPr>
+          <p:cNvPr id="7" name="Rectangle 6"/>
+          <p:cNvSpPr/>
+          <p:nvPr/>
+        </p:nvSpPr>
+        <p:spPr>
+          <a:xfrm>
+            <a:off x="5120640" y="2304288"/>
+            <a:ext cx="4206240" cy="292608"/>
+          </a:xfrm>
+          <a:prstGeom prst="rect">
+            <a:avLst/>
+          </a:prstGeom>
+          <a:solidFill>
+            <a:srgbClr val="D8DEDA"/>
+          </a:solidFill>
+          <a:ln>
+            <a:noFill/>
+          </a:ln>
+          <a:effectLst/>
+        </p:spPr>
+        <p:style>
+          <a:lnRef idx="1">
+            <a:schemeClr val="accent1"/>
+          </a:lnRef>
+          <a:fillRef idx="3">
+            <a:schemeClr val="accent1"/>
+          </a:fillRef>
+          <a:effectRef idx="2">
+            <a:schemeClr val="accent1"/>
+          </a:effectRef>
+          <a:fontRef idx="minor">
+            <a:schemeClr val="lt1"/>
+          </a:fontRef>
+        </p:style>
+        <p:txBody>
+          <a:bodyPr rtlCol="0" anchor="ctr"/>
+          <a:lstStyle/>
+          <a:p>
+            <a:pPr algn="ctr"/>
+          </a:p>
+        </p:txBody>
+      </p:sp>
+      <p:sp>
+        <p:nvSpPr>
+          <p:cNvPr id="8" name="Rectangle 7"/>
+          <p:cNvSpPr/>
+          <p:nvPr/>
+        </p:nvSpPr>
+        <p:spPr>
+          <a:xfrm>
+            <a:off x="5120640" y="2304288"/>
+            <a:ext cx="3154679" cy="292608"/>
+          </a:xfrm>
+          <a:prstGeom prst="rect">
+            <a:avLst/>
+          </a:prstGeom>
+          <a:solidFill>
+            <a:srgbClr val="0F6E5C"/>
+          </a:solidFill>
+          <a:ln>
+            <a:noFill/>
+          </a:ln>
+          <a:effectLst/>
+        </p:spPr>
+        <p:style>
+          <a:lnRef idx="1">
+            <a:schemeClr val="accent1"/>
+          </a:lnRef>
+          <a:fillRef idx="3">
+            <a:schemeClr val="accent1"/>
+          </a:fillRef>
+          <a:effectRef idx="2">
+            <a:schemeClr val="accent1"/>
+          </a:effectRef>
+          <a:fontRef idx="minor">
+            <a:schemeClr val="lt1"/>
+          </a:fontRef>
+        </p:style>
+        <p:txBody>
+          <a:bodyPr rtlCol="0" anchor="ctr"/>
+          <a:lstStyle/>
+          <a:p>
+            <a:pPr algn="ctr"/>
+          </a:p>
+        </p:txBody>
+      </p:sp>
+      <p:sp>
+        <p:nvSpPr>
+          <p:cNvPr id="9" name="TextBox 8"/>
+          <p:cNvSpPr txBox="1"/>
+          <p:nvPr/>
+        </p:nvSpPr>
+        <p:spPr>
+          <a:xfrm>
+            <a:off x="9601200" y="2286000"/>
+            <a:ext cx="2194560" cy="365760"/>
+          </a:xfrm>
+          <a:prstGeom prst="rect">
+            <a:avLst/>
+          </a:prstGeom>
+          <a:noFill/>
+        </p:spPr>
+        <p:txBody>
+          <a:bodyPr wrap="square" lIns="0" rIns="0" tIns="0" bIns="0">
+            <a:spAutoFit/>
+          </a:bodyPr>
+          <a:lstStyle/>
+          <a:p>
+            <a:pPr algn="l">
+              <a:spcBef>
+                <a:spcPts val="0"/>
+              </a:spcBef>
+              <a:spcAft>
+                <a:spcPts val="600"/>
+              </a:spcAft>
+            </a:pPr>
+            <a:r>
+              <a:rPr sz="1400" b="1" i="0">
+                <a:solidFill>
+                  <a:srgbClr val="0F6E5C"/>
+                </a:solidFill>
+                <a:latin typeface="Consolas"/>
+              </a:rPr>
+              <a:t>hides ~3 of 4</a:t>
+            </a:r>
+          </a:p>
+        </p:txBody>
+      </p:sp>
+      <p:sp>
+        <p:nvSpPr>
+          <p:cNvPr id="10" name="TextBox 9"/>
+          <p:cNvSpPr txBox="1"/>
+          <p:nvPr/>
+        </p:nvSpPr>
+        <p:spPr>
+          <a:xfrm>
+            <a:off x="822960" y="3127248"/>
+            <a:ext cx="4206240" cy="365760"/>
+          </a:xfrm>
+          <a:prstGeom prst="rect">
+            <a:avLst/>
+          </a:prstGeom>
+          <a:noFill/>
+        </p:spPr>
+        <p:txBody>
+          <a:bodyPr wrap="square" lIns="0" rIns="0" tIns="0" bIns="0">
+            <a:spAutoFit/>
+          </a:bodyPr>
+          <a:lstStyle/>
+          <a:p>
+            <a:pPr algn="l">
+              <a:spcBef>
+                <a:spcPts val="0"/>
+              </a:spcBef>
+              <a:spcAft>
+                <a:spcPts val="600"/>
+              </a:spcAft>
+            </a:pPr>
+            <a:r>
+              <a:rPr sz="1600" b="1" i="0">
+                <a:solidFill>
+                  <a:srgbClr val="18211E"/>
+                </a:solidFill>
+                <a:latin typeface="Georgia"/>
+              </a:rPr>
+              <a:t>Dates / ages</a:t>
+            </a:r>
+          </a:p>
+        </p:txBody>
+      </p:sp>
+      <p:sp>
+        <p:nvSpPr>
+          <p:cNvPr id="11" name="Rectangle 10"/>
+          <p:cNvSpPr/>
+          <p:nvPr/>
+        </p:nvSpPr>
+        <p:spPr>
+          <a:xfrm>
+            <a:off x="5120640" y="3145536"/>
+            <a:ext cx="4206240" cy="292608"/>
+          </a:xfrm>
+          <a:prstGeom prst="rect">
+            <a:avLst/>
+          </a:prstGeom>
+          <a:solidFill>
+            <a:srgbClr val="D8DEDA"/>
+          </a:solidFill>
+          <a:ln>
+            <a:noFill/>
+          </a:ln>
+          <a:effectLst/>
+        </p:spPr>
+        <p:style>
+          <a:lnRef idx="1">
+            <a:schemeClr val="accent1"/>
+          </a:lnRef>
+          <a:fillRef idx="3">
+            <a:schemeClr val="accent1"/>
+          </a:fillRef>
+          <a:effectRef idx="2">
+            <a:schemeClr val="accent1"/>
+          </a:effectRef>
+          <a:fontRef idx="minor">
+            <a:schemeClr val="lt1"/>
+          </a:fontRef>
+        </p:style>
+        <p:txBody>
+          <a:bodyPr rtlCol="0" anchor="ctr"/>
+          <a:lstStyle/>
+          <a:p>
+            <a:pPr algn="ctr"/>
+          </a:p>
+        </p:txBody>
+      </p:sp>
+      <p:sp>
+        <p:nvSpPr>
+          <p:cNvPr id="12" name="Rectangle 11"/>
+          <p:cNvSpPr/>
+          <p:nvPr/>
+        </p:nvSpPr>
+        <p:spPr>
+          <a:xfrm>
+            <a:off x="5120640" y="3145536"/>
+            <a:ext cx="3070555" cy="292608"/>
+          </a:xfrm>
+          <a:prstGeom prst="rect">
+            <a:avLst/>
+          </a:prstGeom>
+          <a:solidFill>
+            <a:srgbClr val="0F6E5C"/>
+          </a:solidFill>
+          <a:ln>
+            <a:noFill/>
+          </a:ln>
+          <a:effectLst/>
+        </p:spPr>
+        <p:style>
+          <a:lnRef idx="1">
+            <a:schemeClr val="accent1"/>
+          </a:lnRef>
+          <a:fillRef idx="3">
+            <a:schemeClr val="accent1"/>
+          </a:fillRef>
+          <a:effectRef idx="2">
+            <a:schemeClr val="accent1"/>
+          </a:effectRef>
+          <a:fontRef idx="minor">
+            <a:schemeClr val="lt1"/>
+          </a:fontRef>
+        </p:style>
+        <p:txBody>
+          <a:bodyPr rtlCol="0" anchor="ctr"/>
+          <a:lstStyle/>
+          <a:p>
+            <a:pPr algn="ctr"/>
+          </a:p>
+        </p:txBody>
+      </p:sp>
+      <p:sp>
+        <p:nvSpPr>
+          <p:cNvPr id="13" name="TextBox 12"/>
+          <p:cNvSpPr txBox="1"/>
+          <p:nvPr/>
+        </p:nvSpPr>
+        <p:spPr>
+          <a:xfrm>
+            <a:off x="9601200" y="3127248"/>
+            <a:ext cx="2194560" cy="365760"/>
+          </a:xfrm>
+          <a:prstGeom prst="rect">
+            <a:avLst/>
+          </a:prstGeom>
+          <a:noFill/>
+        </p:spPr>
+        <p:txBody>
+          <a:bodyPr wrap="square" lIns="0" rIns="0" tIns="0" bIns="0">
+            <a:spAutoFit/>
+          </a:bodyPr>
+          <a:lstStyle/>
+          <a:p>
+            <a:pPr algn="l">
+              <a:spcBef>
+                <a:spcPts val="0"/>
+              </a:spcBef>
+              <a:spcAft>
+                <a:spcPts val="600"/>
+              </a:spcAft>
+            </a:pPr>
+            <a:r>
+              <a:rPr sz="1400" b="1" i="0">
+                <a:solidFill>
+                  <a:srgbClr val="0F6E5C"/>
+                </a:solidFill>
+                <a:latin typeface="Consolas"/>
+              </a:rPr>
+              <a:t>hides ~3 of 4</a:t>
+            </a:r>
+          </a:p>
+        </p:txBody>
+      </p:sp>
+      <p:sp>
+        <p:nvSpPr>
+          <p:cNvPr id="14" name="TextBox 13"/>
+          <p:cNvSpPr txBox="1"/>
+          <p:nvPr/>
+        </p:nvSpPr>
+        <p:spPr>
+          <a:xfrm>
+            <a:off x="822960" y="3968496"/>
+            <a:ext cx="4206240" cy="365760"/>
+          </a:xfrm>
+          <a:prstGeom prst="rect">
+            <a:avLst/>
+          </a:prstGeom>
+          <a:noFill/>
+        </p:spPr>
+        <p:txBody>
+          <a:bodyPr wrap="square" lIns="0" rIns="0" tIns="0" bIns="0">
+            <a:spAutoFit/>
+          </a:bodyPr>
+          <a:lstStyle/>
+          <a:p>
+            <a:pPr algn="l">
+              <a:spcBef>
+                <a:spcPts val="0"/>
+              </a:spcBef>
+              <a:spcAft>
+                <a:spcPts val="600"/>
+              </a:spcAft>
+            </a:pPr>
+            <a:r>
+              <a:rPr sz="1600" b="1" i="0">
+                <a:solidFill>
+                  <a:srgbClr val="18211E"/>
+                </a:solidFill>
+                <a:latin typeface="Georgia"/>
+              </a:rPr>
+              <a:t>ID numbers (patient ID, phone)</a:t>
+            </a:r>
+          </a:p>
+        </p:txBody>
+      </p:sp>
+      <p:sp>
+        <p:nvSpPr>
+          <p:cNvPr id="15" name="Rectangle 14"/>
+          <p:cNvSpPr/>
+          <p:nvPr/>
+        </p:nvSpPr>
+        <p:spPr>
+          <a:xfrm>
+            <a:off x="5120640" y="3986784"/>
+            <a:ext cx="4206240" cy="292608"/>
+          </a:xfrm>
+          <a:prstGeom prst="rect">
+            <a:avLst/>
+          </a:prstGeom>
+          <a:solidFill>
+            <a:srgbClr val="D8DEDA"/>
+          </a:solidFill>
+          <a:ln>
+            <a:noFill/>
+          </a:ln>
+          <a:effectLst/>
+        </p:spPr>
+        <p:style>
+          <a:lnRef idx="1">
+            <a:schemeClr val="accent1"/>
+          </a:lnRef>
+          <a:fillRef idx="3">
+            <a:schemeClr val="accent1"/>
+          </a:fillRef>
+          <a:effectRef idx="2">
+            <a:schemeClr val="accent1"/>
+          </a:effectRef>
+          <a:fontRef idx="minor">
+            <a:schemeClr val="lt1"/>
+          </a:fontRef>
+        </p:style>
+        <p:txBody>
+          <a:bodyPr rtlCol="0" anchor="ctr"/>
+          <a:lstStyle/>
+          <a:p>
+            <a:pPr algn="ctr"/>
+          </a:p>
+        </p:txBody>
+      </p:sp>
+      <p:sp>
+        <p:nvSpPr>
+          <p:cNvPr id="16" name="Rectangle 15"/>
+          <p:cNvSpPr/>
+          <p:nvPr/>
+        </p:nvSpPr>
+        <p:spPr>
+          <a:xfrm>
+            <a:off x="5120640" y="3986784"/>
+            <a:ext cx="2145182" cy="292608"/>
+          </a:xfrm>
+          <a:prstGeom prst="rect">
+            <a:avLst/>
+          </a:prstGeom>
+          <a:solidFill>
+            <a:srgbClr val="BD5B36"/>
+          </a:solidFill>
+          <a:ln>
+            <a:noFill/>
+          </a:ln>
+          <a:effectLst/>
+        </p:spPr>
+        <p:style>
+          <a:lnRef idx="1">
+            <a:schemeClr val="accent1"/>
+          </a:lnRef>
+          <a:fillRef idx="3">
+            <a:schemeClr val="accent1"/>
+          </a:fillRef>
+          <a:effectRef idx="2">
+            <a:schemeClr val="accent1"/>
+          </a:effectRef>
+          <a:fontRef idx="minor">
+            <a:schemeClr val="lt1"/>
+          </a:fontRef>
+        </p:style>
+        <p:txBody>
+          <a:bodyPr rtlCol="0" anchor="ctr"/>
+          <a:lstStyle/>
+          <a:p>
+            <a:pPr algn="ctr"/>
+          </a:p>
+        </p:txBody>
+      </p:sp>
+      <p:sp>
+        <p:nvSpPr>
+          <p:cNvPr id="17" name="TextBox 16"/>
+          <p:cNvSpPr txBox="1"/>
+          <p:nvPr/>
+        </p:nvSpPr>
+        <p:spPr>
+          <a:xfrm>
+            <a:off x="9601200" y="3968496"/>
+            <a:ext cx="2194560" cy="365760"/>
+          </a:xfrm>
+          <a:prstGeom prst="rect">
+            <a:avLst/>
+          </a:prstGeom>
+          <a:noFill/>
+        </p:spPr>
+        <p:txBody>
+          <a:bodyPr wrap="square" lIns="0" rIns="0" tIns="0" bIns="0">
+            <a:spAutoFit/>
+          </a:bodyPr>
+          <a:lstStyle/>
+          <a:p>
+            <a:pPr algn="l">
+              <a:spcBef>
+                <a:spcPts val="0"/>
+              </a:spcBef>
+              <a:spcAft>
+                <a:spcPts val="600"/>
+              </a:spcAft>
+            </a:pPr>
+            <a:r>
+              <a:rPr sz="1400" b="1" i="0">
+                <a:solidFill>
+                  <a:srgbClr val="BD5B36"/>
+                </a:solidFill>
+                <a:latin typeface="Consolas"/>
+              </a:rPr>
+              <a:t>hides ~1 of 2</a:t>
+            </a:r>
+          </a:p>
+        </p:txBody>
+      </p:sp>
+      <p:sp>
+        <p:nvSpPr>
+          <p:cNvPr id="18" name="TextBox 17"/>
+          <p:cNvSpPr txBox="1"/>
+          <p:nvPr/>
+        </p:nvSpPr>
+        <p:spPr>
+          <a:xfrm>
+            <a:off x="822960" y="4809744"/>
+            <a:ext cx="4206240" cy="365760"/>
+          </a:xfrm>
+          <a:prstGeom prst="rect">
+            <a:avLst/>
+          </a:prstGeom>
+          <a:noFill/>
+        </p:spPr>
+        <p:txBody>
+          <a:bodyPr wrap="square" lIns="0" rIns="0" tIns="0" bIns="0">
+            <a:spAutoFit/>
+          </a:bodyPr>
+          <a:lstStyle/>
+          <a:p>
+            <a:pPr algn="l">
+              <a:spcBef>
+                <a:spcPts val="0"/>
+              </a:spcBef>
+              <a:spcAft>
+                <a:spcPts val="600"/>
+              </a:spcAft>
+            </a:pPr>
+            <a:r>
+              <a:rPr sz="1600" b="1" i="0">
+                <a:solidFill>
+                  <a:srgbClr val="18211E"/>
+                </a:solidFill>
+                <a:latin typeface="Georgia"/>
+              </a:rPr>
+              <a:t>Addresses / places</a:t>
+            </a:r>
+          </a:p>
+        </p:txBody>
+      </p:sp>
+      <p:sp>
+        <p:nvSpPr>
+          <p:cNvPr id="19" name="Rectangle 18"/>
+          <p:cNvSpPr/>
+          <p:nvPr/>
+        </p:nvSpPr>
+        <p:spPr>
+          <a:xfrm>
+            <a:off x="5120640" y="4828032"/>
+            <a:ext cx="4206240" cy="292608"/>
+          </a:xfrm>
+          <a:prstGeom prst="rect">
+            <a:avLst/>
+          </a:prstGeom>
+          <a:solidFill>
+            <a:srgbClr val="D8DEDA"/>
+          </a:solidFill>
+          <a:ln>
+            <a:noFill/>
+          </a:ln>
+          <a:effectLst/>
+        </p:spPr>
+        <p:style>
+          <a:lnRef idx="1">
+            <a:schemeClr val="accent1"/>
+          </a:lnRef>
+          <a:fillRef idx="3">
+            <a:schemeClr val="accent1"/>
+          </a:fillRef>
+          <a:effectRef idx="2">
+            <a:schemeClr val="accent1"/>
+          </a:effectRef>
+          <a:fontRef idx="minor">
+            <a:schemeClr val="lt1"/>
+          </a:fontRef>
+        </p:style>
+        <p:txBody>
+          <a:bodyPr rtlCol="0" anchor="ctr"/>
+          <a:lstStyle/>
+          <a:p>
+            <a:pPr algn="ctr"/>
+          </a:p>
+        </p:txBody>
+      </p:sp>
+      <p:sp>
+        <p:nvSpPr>
+          <p:cNvPr id="20" name="Rectangle 19"/>
+          <p:cNvSpPr/>
+          <p:nvPr/>
+        </p:nvSpPr>
+        <p:spPr>
+          <a:xfrm>
+            <a:off x="5120640" y="4828032"/>
+            <a:ext cx="1850745" cy="292608"/>
+          </a:xfrm>
+          <a:prstGeom prst="rect">
+            <a:avLst/>
+          </a:prstGeom>
+          <a:solidFill>
+            <a:srgbClr val="BD5B36"/>
+          </a:solidFill>
+          <a:ln>
+            <a:noFill/>
+          </a:ln>
+          <a:effectLst/>
+        </p:spPr>
+        <p:style>
+          <a:lnRef idx="1">
+            <a:schemeClr val="accent1"/>
+          </a:lnRef>
+          <a:fillRef idx="3">
+            <a:schemeClr val="accent1"/>
+          </a:fillRef>
+          <a:effectRef idx="2">
+            <a:schemeClr val="accent1"/>
+          </a:effectRef>
+          <a:fontRef idx="minor">
+            <a:schemeClr val="lt1"/>
+          </a:fontRef>
+        </p:style>
+        <p:txBody>
+          <a:bodyPr rtlCol="0" anchor="ctr"/>
+          <a:lstStyle/>
+          <a:p>
+            <a:pPr algn="ctr"/>
+          </a:p>
+        </p:txBody>
+      </p:sp>
+      <p:sp>
+        <p:nvSpPr>
+          <p:cNvPr id="21" name="TextBox 20"/>
+          <p:cNvSpPr txBox="1"/>
+          <p:nvPr/>
+        </p:nvSpPr>
+        <p:spPr>
+          <a:xfrm>
+            <a:off x="9601200" y="4809744"/>
+            <a:ext cx="2194560" cy="365760"/>
+          </a:xfrm>
+          <a:prstGeom prst="rect">
+            <a:avLst/>
+          </a:prstGeom>
+          <a:noFill/>
+        </p:spPr>
+        <p:txBody>
+          <a:bodyPr wrap="square" lIns="0" rIns="0" tIns="0" bIns="0">
+            <a:spAutoFit/>
+          </a:bodyPr>
+          <a:lstStyle/>
+          <a:p>
+            <a:pPr algn="l">
+              <a:spcBef>
+                <a:spcPts val="0"/>
+              </a:spcBef>
+              <a:spcAft>
+                <a:spcPts val="600"/>
+              </a:spcAft>
+            </a:pPr>
+            <a:r>
+              <a:rPr sz="1400" b="1" i="0">
+                <a:solidFill>
+                  <a:srgbClr val="BD5B36"/>
+                </a:solidFill>
+                <a:latin typeface="Consolas"/>
+              </a:rPr>
+              <a:t>hides ~1 of 2</a:t>
             </a:r>
           </a:p>
         </p:txBody>
@@ -4853,6 +4854,295 @@
 </file>
 
 <file path=ppt/slides/slide5.xml><?xml version="1.0" encoding="utf-8"?>
+<p:sld xmlns:a="http://schemas.openxmlformats.org/drawingml/2006/main" xmlns:p="http://schemas.openxmlformats.org/presentationml/2006/main" xmlns:r="http://schemas.openxmlformats.org/officeDocument/2006/relationships">
+  <p:cSld>
+    <p:spTree>
+      <p:nvGrpSpPr>
+        <p:cNvPr id="1" name=""/>
+        <p:cNvGrpSpPr/>
+        <p:nvPr/>
+      </p:nvGrpSpPr>
+      <p:grpSpPr/>
+      <p:sp>
+        <p:nvSpPr>
+          <p:cNvPr id="2" name="Rectangle 1"/>
+          <p:cNvSpPr/>
+          <p:nvPr/>
+        </p:nvSpPr>
+        <p:spPr>
+          <a:xfrm>
+            <a:off x="0" y="0"/>
+            <a:ext cx="12191695" cy="6858000"/>
+          </a:xfrm>
+          <a:prstGeom prst="rect">
+            <a:avLst/>
+          </a:prstGeom>
+          <a:solidFill>
+            <a:srgbClr val="E9ECEA"/>
+          </a:solidFill>
+          <a:ln>
+            <a:noFill/>
+          </a:ln>
+          <a:effectLst/>
+        </p:spPr>
+        <p:style>
+          <a:lnRef idx="1">
+            <a:schemeClr val="accent1"/>
+          </a:lnRef>
+          <a:fillRef idx="3">
+            <a:schemeClr val="accent1"/>
+          </a:fillRef>
+          <a:effectRef idx="2">
+            <a:schemeClr val="accent1"/>
+          </a:effectRef>
+          <a:fontRef idx="minor">
+            <a:schemeClr val="lt1"/>
+          </a:fontRef>
+        </p:style>
+        <p:txBody>
+          <a:bodyPr rtlCol="0" anchor="ctr"/>
+          <a:lstStyle/>
+          <a:p>
+            <a:pPr algn="ctr"/>
+          </a:p>
+        </p:txBody>
+      </p:sp>
+      <p:sp>
+        <p:nvSpPr>
+          <p:cNvPr id="3" name="TextBox 2"/>
+          <p:cNvSpPr txBox="1"/>
+          <p:nvPr/>
+        </p:nvSpPr>
+        <p:spPr>
+          <a:xfrm>
+            <a:off x="640080" y="502920"/>
+            <a:ext cx="10881360" cy="365760"/>
+          </a:xfrm>
+          <a:prstGeom prst="rect">
+            <a:avLst/>
+          </a:prstGeom>
+          <a:noFill/>
+        </p:spPr>
+        <p:txBody>
+          <a:bodyPr wrap="square" lIns="0" rIns="0" tIns="0" bIns="0">
+            <a:spAutoFit/>
+          </a:bodyPr>
+          <a:lstStyle/>
+          <a:p>
+            <a:pPr algn="l">
+              <a:spcBef>
+                <a:spcPts val="0"/>
+              </a:spcBef>
+              <a:spcAft>
+                <a:spcPts val="600"/>
+              </a:spcAft>
+            </a:pPr>
+            <a:r>
+              <a:rPr sz="1200" b="1" i="0">
+                <a:solidFill>
+                  <a:srgbClr val="0F6E5C"/>
+                </a:solidFill>
+                <a:latin typeface="Consolas"/>
+              </a:rPr>
+              <a:t>04 · THE GOOD NEWS ABOUT THE GAP</a:t>
+            </a:r>
+          </a:p>
+        </p:txBody>
+      </p:sp>
+      <p:sp>
+        <p:nvSpPr>
+          <p:cNvPr id="4" name="Rectangle 3"/>
+          <p:cNvSpPr/>
+          <p:nvPr/>
+        </p:nvSpPr>
+        <p:spPr>
+          <a:xfrm>
+            <a:off x="640080" y="914400"/>
+            <a:ext cx="10881360" cy="27940"/>
+          </a:xfrm>
+          <a:prstGeom prst="rect">
+            <a:avLst/>
+          </a:prstGeom>
+          <a:solidFill>
+            <a:srgbClr val="18211E"/>
+          </a:solidFill>
+          <a:ln>
+            <a:noFill/>
+          </a:ln>
+          <a:effectLst/>
+        </p:spPr>
+        <p:style>
+          <a:lnRef idx="1">
+            <a:schemeClr val="accent1"/>
+          </a:lnRef>
+          <a:fillRef idx="3">
+            <a:schemeClr val="accent1"/>
+          </a:fillRef>
+          <a:effectRef idx="2">
+            <a:schemeClr val="accent1"/>
+          </a:effectRef>
+          <a:fontRef idx="minor">
+            <a:schemeClr val="lt1"/>
+          </a:fontRef>
+        </p:style>
+        <p:txBody>
+          <a:bodyPr rtlCol="0" anchor="ctr"/>
+          <a:lstStyle/>
+          <a:p>
+            <a:pPr algn="ctr"/>
+          </a:p>
+        </p:txBody>
+      </p:sp>
+      <p:sp>
+        <p:nvSpPr>
+          <p:cNvPr id="5" name="TextBox 4"/>
+          <p:cNvSpPr txBox="1"/>
+          <p:nvPr/>
+        </p:nvSpPr>
+        <p:spPr>
+          <a:xfrm>
+            <a:off x="640080" y="1828800"/>
+            <a:ext cx="4937760" cy="2743200"/>
+          </a:xfrm>
+          <a:prstGeom prst="rect">
+            <a:avLst/>
+          </a:prstGeom>
+          <a:noFill/>
+        </p:spPr>
+        <p:txBody>
+          <a:bodyPr wrap="square" lIns="0" rIns="0" tIns="0" bIns="0">
+            <a:spAutoFit/>
+          </a:bodyPr>
+          <a:lstStyle/>
+          <a:p>
+            <a:pPr algn="l">
+              <a:spcBef>
+                <a:spcPts val="0"/>
+              </a:spcBef>
+              <a:spcAft>
+                <a:spcPts val="800"/>
+              </a:spcAft>
+            </a:pPr>
+            <a:r>
+              <a:rPr sz="7800" b="1" i="0">
+                <a:solidFill>
+                  <a:srgbClr val="0F6E5C"/>
+                </a:solidFill>
+                <a:latin typeface="Consolas"/>
+              </a:rPr>
+              <a:t>~3 in 4</a:t>
+            </a:r>
+          </a:p>
+          <a:p>
+            <a:pPr algn="l">
+              <a:spcBef>
+                <a:spcPts val="0"/>
+              </a:spcBef>
+              <a:spcAft>
+                <a:spcPts val="600"/>
+              </a:spcAft>
+            </a:pPr>
+            <a:r>
+              <a:rPr sz="1200" b="1" i="0">
+                <a:solidFill>
+                  <a:srgbClr val="5C6B64"/>
+                </a:solidFill>
+                <a:latin typeface="Consolas"/>
+              </a:rPr>
+              <a:t>OF THE MISSES, THE TOOL ALREADY KNEW IT WAS PRIVATE</a:t>
+            </a:r>
+          </a:p>
+        </p:txBody>
+      </p:sp>
+      <p:sp>
+        <p:nvSpPr>
+          <p:cNvPr id="6" name="TextBox 5"/>
+          <p:cNvSpPr txBox="1"/>
+          <p:nvPr/>
+        </p:nvSpPr>
+        <p:spPr>
+          <a:xfrm>
+            <a:off x="5852160" y="1920240"/>
+            <a:ext cx="5669280" cy="2926080"/>
+          </a:xfrm>
+          <a:prstGeom prst="rect">
+            <a:avLst/>
+          </a:prstGeom>
+          <a:noFill/>
+        </p:spPr>
+        <p:txBody>
+          <a:bodyPr wrap="square" lIns="0" rIns="0" tIns="0" bIns="0">
+            <a:spAutoFit/>
+          </a:bodyPr>
+          <a:lstStyle/>
+          <a:p>
+            <a:pPr algn="l">
+              <a:spcBef>
+                <a:spcPts val="0"/>
+              </a:spcBef>
+              <a:spcAft>
+                <a:spcPts val="1400"/>
+              </a:spcAft>
+            </a:pPr>
+            <a:r>
+              <a:rPr sz="2400" b="1" i="0">
+                <a:solidFill>
+                  <a:srgbClr val="18211E"/>
+                </a:solidFill>
+                <a:latin typeface="Georgia"/>
+              </a:rPr>
+              <a:t>It's a swapping gap, not a finding gap.</a:t>
+            </a:r>
+          </a:p>
+          <a:p>
+            <a:pPr algn="l">
+              <a:spcBef>
+                <a:spcPts val="0"/>
+              </a:spcBef>
+              <a:spcAft>
+                <a:spcPts val="1000"/>
+              </a:spcAft>
+            </a:pPr>
+            <a:r>
+              <a:rPr sz="1800" b="0" i="0">
+                <a:solidFill>
+                  <a:srgbClr val="18211E"/>
+                </a:solidFill>
+                <a:latin typeface="Georgia"/>
+              </a:rPr>
+              <a:t>For most of what slips through, the tool had already flagged it as sensitive — it just didn't swap it. So the fix is in the swap step, not in teaching it what's private.</a:t>
+            </a:r>
+          </a:p>
+          <a:p>
+            <a:pPr algn="l">
+              <a:spcBef>
+                <a:spcPts val="0"/>
+              </a:spcBef>
+              <a:spcAft>
+                <a:spcPts val="600"/>
+              </a:spcAft>
+            </a:pPr>
+            <a:r>
+              <a:rPr sz="1500" b="0" i="0">
+                <a:solidFill>
+                  <a:srgbClr val="5C6B64"/>
+                </a:solidFill>
+                <a:latin typeface="Georgia"/>
+              </a:rPr>
+              <a:t>That's the easier kind of problem to fix.</a:t>
+            </a:r>
+          </a:p>
+        </p:txBody>
+      </p:sp>
+    </p:spTree>
+  </p:cSld>
+  <p:clrMapOvr>
+    <a:masterClrMapping/>
+  </p:clrMapOvr>
+</p:sld>
+</file>
+
+<file path=ppt/slides/slide6.xml><?xml version="1.0" encoding="utf-8"?>
 <p:sld xmlns:a="http://schemas.openxmlformats.org/drawingml/2006/main" xmlns:p="http://schemas.openxmlformats.org/presentationml/2006/main" xmlns:r="http://schemas.openxmlformats.org/officeDocument/2006/relationships">
   <p:cSld>
     <p:spTree>

--- a/docs/guardian_layer_internal.pptx
+++ b/docs/guardian_layer_internal.pptx
@@ -3159,10 +3159,7 @@
           </a:bodyPr>
           <a:lstStyle/>
           <a:p>
-            <a:pPr algn="l">
-              <a:spcBef>
-                <a:spcPts val="0"/>
-              </a:spcBef>
+            <a:pPr>
               <a:spcAft>
                 <a:spcPts val="600"/>
               </a:spcAft>
@@ -3231,8 +3228,8 @@
         </p:nvSpPr>
         <p:spPr>
           <a:xfrm>
-            <a:off x="640080" y="2103120"/>
-            <a:ext cx="10881360" cy="2377440"/>
+            <a:off x="640080" y="2468880"/>
+            <a:ext cx="10881360" cy="1828800"/>
           </a:xfrm>
           <a:prstGeom prst="rect">
             <a:avLst/>
@@ -3245,10 +3242,7 @@
           </a:bodyPr>
           <a:lstStyle/>
           <a:p>
-            <a:pPr algn="l">
-              <a:spcBef>
-                <a:spcPts val="0"/>
-              </a:spcBef>
+            <a:pPr>
               <a:spcAft>
                 <a:spcPts val="200"/>
               </a:spcAft>
@@ -3260,131 +3254,23 @@
                 </a:solidFill>
                 <a:latin typeface="Georgia"/>
               </a:rPr>
-              <a:t>What we learned about</a:t>
-            </a:r>
-          </a:p>
-          <a:p>
-            <a:pPr algn="l">
-              <a:spcBef>
-                <a:spcPts val="0"/>
-              </a:spcBef>
-              <a:spcAft>
-                <a:spcPts val="1800"/>
-              </a:spcAft>
-            </a:pPr>
-            <a:r>
-              <a:rPr sz="4400" b="1" i="1">
-                <a:solidFill>
-                  <a:srgbClr val="0F6E5C"/>
-                </a:solidFill>
-                <a:latin typeface="Georgia"/>
-              </a:rPr>
-              <a:t>the privacy swap.</a:t>
-            </a:r>
-          </a:p>
-          <a:p>
-            <a:pPr algn="l">
-              <a:spcBef>
-                <a:spcPts val="0"/>
-              </a:spcBef>
+              <a:t>What we learned</a:t>
+            </a:r>
+          </a:p>
+          <a:p>
+            <a:pPr>
               <a:spcAft>
                 <a:spcPts val="600"/>
               </a:spcAft>
             </a:pPr>
             <a:r>
-              <a:rPr sz="2000" b="0" i="0">
-                <a:solidFill>
-                  <a:srgbClr val="5C6B64"/>
+              <a:rPr sz="4400" b="1" i="1">
+                <a:solidFill>
+                  <a:srgbClr val="0F6E5C"/>
                 </a:solidFill>
                 <a:latin typeface="Georgia"/>
               </a:rPr>
-              <a:t>Two things matter: does it keep data usable, and does it hide enough? Here's the honest read on both.</a:t>
-            </a:r>
-          </a:p>
-        </p:txBody>
-      </p:sp>
-      <p:sp>
-        <p:nvSpPr>
-          <p:cNvPr id="6" name="Rectangle 5"/>
-          <p:cNvSpPr/>
-          <p:nvPr/>
-        </p:nvSpPr>
-        <p:spPr>
-          <a:xfrm>
-            <a:off x="640080" y="5943600"/>
-            <a:ext cx="10881360" cy="27940"/>
-          </a:xfrm>
-          <a:prstGeom prst="rect">
-            <a:avLst/>
-          </a:prstGeom>
-          <a:solidFill>
-            <a:srgbClr val="18211E"/>
-          </a:solidFill>
-          <a:ln>
-            <a:noFill/>
-          </a:ln>
-          <a:effectLst/>
-        </p:spPr>
-        <p:style>
-          <a:lnRef idx="1">
-            <a:schemeClr val="accent1"/>
-          </a:lnRef>
-          <a:fillRef idx="3">
-            <a:schemeClr val="accent1"/>
-          </a:fillRef>
-          <a:effectRef idx="2">
-            <a:schemeClr val="accent1"/>
-          </a:effectRef>
-          <a:fontRef idx="minor">
-            <a:schemeClr val="lt1"/>
-          </a:fontRef>
-        </p:style>
-        <p:txBody>
-          <a:bodyPr rtlCol="0" anchor="ctr"/>
-          <a:lstStyle/>
-          <a:p>
-            <a:pPr algn="ctr"/>
-          </a:p>
-        </p:txBody>
-      </p:sp>
-      <p:sp>
-        <p:nvSpPr>
-          <p:cNvPr id="7" name="TextBox 6"/>
-          <p:cNvSpPr txBox="1"/>
-          <p:nvPr/>
-        </p:nvSpPr>
-        <p:spPr>
-          <a:xfrm>
-            <a:off x="640080" y="6053328"/>
-            <a:ext cx="10881360" cy="457200"/>
-          </a:xfrm>
-          <a:prstGeom prst="rect">
-            <a:avLst/>
-          </a:prstGeom>
-          <a:noFill/>
-        </p:spPr>
-        <p:txBody>
-          <a:bodyPr wrap="square" lIns="0" rIns="0" tIns="0" bIns="0">
-            <a:spAutoFit/>
-          </a:bodyPr>
-          <a:lstStyle/>
-          <a:p>
-            <a:pPr algn="l">
-              <a:spcBef>
-                <a:spcPts val="0"/>
-              </a:spcBef>
-              <a:spcAft>
-                <a:spcPts val="600"/>
-              </a:spcAft>
-            </a:pPr>
-            <a:r>
-              <a:rPr sz="1200" b="0" i="0">
-                <a:solidFill>
-                  <a:srgbClr val="5C6B64"/>
-                </a:solidFill>
-                <a:latin typeface="Consolas"/>
-              </a:rPr>
-              <a:t>Internal — for the team. The client-facing deck covers the usability win only.</a:t>
+              <a:t>about the privacy swap.</a:t>
             </a:r>
           </a:p>
         </p:txBody>
@@ -3473,10 +3359,7 @@
           </a:bodyPr>
           <a:lstStyle/>
           <a:p>
-            <a:pPr algn="l">
-              <a:spcBef>
-                <a:spcPts val="0"/>
-              </a:spcBef>
+            <a:pPr>
               <a:spcAft>
                 <a:spcPts val="600"/>
               </a:spcAft>
@@ -3488,7 +3371,7 @@
                 </a:solidFill>
                 <a:latin typeface="Consolas"/>
               </a:rPr>
-              <a:t>01 · THE GOOD NEWS</a:t>
+              <a:t>01 · KEEPS DATA USABLE</a:t>
             </a:r>
           </a:p>
         </p:txBody>
@@ -3545,8 +3428,8 @@
         </p:nvSpPr>
         <p:spPr>
           <a:xfrm>
-            <a:off x="640080" y="1828800"/>
-            <a:ext cx="4937760" cy="2743200"/>
+            <a:off x="640080" y="2377440"/>
+            <a:ext cx="6400800" cy="1828800"/>
           </a:xfrm>
           <a:prstGeom prst="rect">
             <a:avLst/>
@@ -3559,41 +3442,35 @@
           </a:bodyPr>
           <a:lstStyle/>
           <a:p>
-            <a:pPr algn="l">
-              <a:spcBef>
-                <a:spcPts val="0"/>
-              </a:spcBef>
-              <a:spcAft>
-                <a:spcPts val="800"/>
-              </a:spcAft>
-            </a:pPr>
-            <a:r>
-              <a:rPr sz="7800" b="1" i="0">
-                <a:solidFill>
-                  <a:srgbClr val="0F6E5C"/>
-                </a:solidFill>
-                <a:latin typeface="Consolas"/>
-              </a:rPr>
-              <a:t>97–100%</a:t>
-            </a:r>
-          </a:p>
-          <a:p>
-            <a:pPr algn="l">
-              <a:spcBef>
-                <a:spcPts val="0"/>
-              </a:spcBef>
+            <a:pPr>
               <a:spcAft>
                 <a:spcPts val="600"/>
               </a:spcAft>
             </a:pPr>
             <a:r>
-              <a:rPr sz="1200" b="1" i="0">
-                <a:solidFill>
-                  <a:srgbClr val="5C6B64"/>
+              <a:rPr sz="9600" b="1" i="0">
+                <a:solidFill>
+                  <a:srgbClr val="0F6E5C"/>
                 </a:solidFill>
                 <a:latin typeface="Consolas"/>
               </a:rPr>
-              <a:t>WHEN IT SWAPS SOMETHING, OTHER TOOLS STILL FIND IT</a:t>
+              <a:t>97–100%</a:t>
+            </a:r>
+          </a:p>
+          <a:p>
+            <a:pPr>
+              <a:spcAft>
+                <a:spcPts val="600"/>
+              </a:spcAft>
+            </a:pPr>
+            <a:r>
+              <a:rPr sz="1800" b="0" i="0">
+                <a:solidFill>
+                  <a:srgbClr val="5C6B64"/>
+                </a:solidFill>
+                <a:latin typeface="Georgia"/>
+              </a:rPr>
+              <a:t>swapped info still found by other tools</a:t>
             </a:r>
           </a:p>
         </p:txBody>
@@ -3606,8 +3483,8 @@
         </p:nvSpPr>
         <p:spPr>
           <a:xfrm>
-            <a:off x="5852160" y="1920240"/>
-            <a:ext cx="5669280" cy="2926080"/>
+            <a:off x="7315200" y="2834640"/>
+            <a:ext cx="4206240" cy="1371600"/>
           </a:xfrm>
           <a:prstGeom prst="rect">
             <a:avLst/>
@@ -3620,60 +3497,35 @@
           </a:bodyPr>
           <a:lstStyle/>
           <a:p>
-            <a:pPr algn="l">
-              <a:spcBef>
-                <a:spcPts val="0"/>
-              </a:spcBef>
+            <a:pPr>
               <a:spcAft>
-                <a:spcPts val="1400"/>
+                <a:spcPts val="200"/>
               </a:spcAft>
             </a:pPr>
             <a:r>
-              <a:rPr sz="2400" b="1" i="0">
+              <a:rPr sz="1900" b="1" i="0">
                 <a:solidFill>
                   <a:srgbClr val="18211E"/>
                 </a:solidFill>
                 <a:latin typeface="Georgia"/>
               </a:rPr>
-              <a:t>The swap keeps data usable.</a:t>
-            </a:r>
-          </a:p>
-          <a:p>
-            <a:pPr algn="l">
-              <a:spcBef>
-                <a:spcPts val="0"/>
-              </a:spcBef>
-              <a:spcAft>
-                <a:spcPts val="1000"/>
-              </a:spcAft>
-            </a:pPr>
-            <a:r>
-              <a:rPr sz="1800" b="0" i="0">
-                <a:solidFill>
-                  <a:srgbClr val="18211E"/>
-                </a:solidFill>
-                <a:latin typeface="Georgia"/>
-              </a:rPr>
-              <a:t>After swapping, other tools still spot the sensitive details almost every time, and the format (medical notes, forms, data files) stays exactly the same. Nothing downstream breaks.</a:t>
-            </a:r>
-          </a:p>
-          <a:p>
-            <a:pPr algn="l">
-              <a:spcBef>
-                <a:spcPts val="0"/>
-              </a:spcBef>
+              <a:t>Across 11 tools,</a:t>
+            </a:r>
+          </a:p>
+          <a:p>
+            <a:pPr>
               <a:spcAft>
                 <a:spcPts val="600"/>
               </a:spcAft>
             </a:pPr>
             <a:r>
-              <a:rPr sz="1500" b="0" i="0">
-                <a:solidFill>
-                  <a:srgbClr val="5C6B64"/>
+              <a:rPr sz="1900" b="0" i="0">
+                <a:solidFill>
+                  <a:srgbClr val="18211E"/>
                 </a:solidFill>
                 <a:latin typeface="Georgia"/>
               </a:rPr>
-              <a:t>This is the client-facing win — solid across all 11 tools and 7 datasets.</a:t>
+              <a:t>7 datasets. Format intact.</a:t>
             </a:r>
           </a:p>
         </p:txBody>
@@ -3762,10 +3614,7 @@
           </a:bodyPr>
           <a:lstStyle/>
           <a:p>
-            <a:pPr algn="l">
-              <a:spcBef>
-                <a:spcPts val="0"/>
-              </a:spcBef>
+            <a:pPr>
               <a:spcAft>
                 <a:spcPts val="600"/>
               </a:spcAft>
@@ -3834,8 +3683,8 @@
         </p:nvSpPr>
         <p:spPr>
           <a:xfrm>
-            <a:off x="640080" y="1828800"/>
-            <a:ext cx="4937760" cy="2743200"/>
+            <a:off x="640080" y="2377440"/>
+            <a:ext cx="6400800" cy="1828800"/>
           </a:xfrm>
           <a:prstGeom prst="rect">
             <a:avLst/>
@@ -3848,41 +3697,35 @@
           </a:bodyPr>
           <a:lstStyle/>
           <a:p>
-            <a:pPr algn="l">
-              <a:spcBef>
-                <a:spcPts val="0"/>
-              </a:spcBef>
-              <a:spcAft>
-                <a:spcPts val="800"/>
-              </a:spcAft>
-            </a:pPr>
-            <a:r>
-              <a:rPr sz="7800" b="1" i="0">
-                <a:solidFill>
-                  <a:srgbClr val="0F6E5C"/>
-                </a:solidFill>
-                <a:latin typeface="Consolas"/>
-              </a:rPr>
-              <a:t>±2 pts</a:t>
-            </a:r>
-          </a:p>
-          <a:p>
-            <a:pPr algn="l">
-              <a:spcBef>
-                <a:spcPts val="0"/>
-              </a:spcBef>
+            <a:pPr>
               <a:spcAft>
                 <a:spcPts val="600"/>
               </a:spcAft>
             </a:pPr>
             <a:r>
-              <a:rPr sz="1200" b="1" i="0">
-                <a:solidFill>
-                  <a:srgbClr val="5C6B64"/>
+              <a:rPr sz="9600" b="1" i="0">
+                <a:solidFill>
+                  <a:srgbClr val="0F6E5C"/>
                 </a:solidFill>
                 <a:latin typeface="Consolas"/>
               </a:rPr>
-              <a:t>PROVEN-EQUIVALENT MARGIN (TOST, p≈1e-8)</a:t>
+              <a:t>±2 pts</a:t>
+            </a:r>
+          </a:p>
+          <a:p>
+            <a:pPr>
+              <a:spcAft>
+                <a:spcPts val="600"/>
+              </a:spcAft>
+            </a:pPr>
+            <a:r>
+              <a:rPr sz="1800" b="0" i="0">
+                <a:solidFill>
+                  <a:srgbClr val="5C6B64"/>
+                </a:solidFill>
+                <a:latin typeface="Georgia"/>
+              </a:rPr>
+              <a:t>statistically equivalent to zero (TOST)</a:t>
             </a:r>
           </a:p>
         </p:txBody>
@@ -3895,8 +3738,8 @@
         </p:nvSpPr>
         <p:spPr>
           <a:xfrm>
-            <a:off x="5852160" y="1828800"/>
-            <a:ext cx="5669280" cy="3108960"/>
+            <a:off x="7315200" y="2743200"/>
+            <a:ext cx="4297680" cy="1828800"/>
           </a:xfrm>
           <a:prstGeom prst="rect">
             <a:avLst/>
@@ -3909,60 +3752,51 @@
           </a:bodyPr>
           <a:lstStyle/>
           <a:p>
-            <a:pPr algn="l">
-              <a:spcBef>
-                <a:spcPts val="0"/>
-              </a:spcBef>
+            <a:pPr>
               <a:spcAft>
-                <a:spcPts val="1200"/>
+                <a:spcPts val="200"/>
               </a:spcAft>
             </a:pPr>
             <a:r>
-              <a:rPr sz="2400" b="1" i="0">
+              <a:rPr sz="1900" b="1" i="0">
                 <a:solidFill>
                   <a:srgbClr val="18211E"/>
                 </a:solidFill>
                 <a:latin typeface="Georgia"/>
               </a:rPr>
-              <a:t>Not a drop — statistically equivalent.</a:t>
-            </a:r>
-          </a:p>
-          <a:p>
-            <a:pPr algn="l">
-              <a:spcBef>
-                <a:spcPts val="0"/>
-              </a:spcBef>
+              <a:t>Recall 76.2% → 75.0%.</a:t>
+            </a:r>
+          </a:p>
+          <a:p>
+            <a:pPr>
               <a:spcAft>
-                <a:spcPts val="1000"/>
+                <a:spcPts val="200"/>
               </a:spcAft>
             </a:pPr>
             <a:r>
-              <a:rPr sz="1700" b="0" i="0">
+              <a:rPr sz="1900" b="0" i="0">
                 <a:solidFill>
                   <a:srgbClr val="18211E"/>
                 </a:solidFill>
                 <a:latin typeface="Georgia"/>
               </a:rPr>
-              <a:t>On the 56,174 masked spans, detector recall is 76.2% → 75.0% (−1.2 pts). With 56k paired observations even a tiny shift trips a plain significance test, so we use an equivalence test instead.</a:t>
-            </a:r>
-          </a:p>
-          <a:p>
-            <a:pPr algn="l">
-              <a:spcBef>
-                <a:spcPts val="0"/>
-              </a:spcBef>
+              <a:t>Not a drop — too small</a:t>
+            </a:r>
+          </a:p>
+          <a:p>
+            <a:pPr>
               <a:spcAft>
                 <a:spcPts val="600"/>
               </a:spcAft>
             </a:pPr>
             <a:r>
-              <a:rPr sz="1600" b="0" i="0">
-                <a:solidFill>
-                  <a:srgbClr val="5C6B64"/>
+              <a:rPr sz="1900" b="0" i="0">
+                <a:solidFill>
+                  <a:srgbClr val="18211E"/>
                 </a:solidFill>
                 <a:latin typeface="Georgia"/>
               </a:rPr>
-              <a:t>It confirms the change is statistically equivalent to zero within ±2 points — provably too small to matter, not merely “not significant.”</a:t>
+              <a:t>to matter.</a:t>
             </a:r>
           </a:p>
         </p:txBody>
@@ -4051,10 +3885,7 @@
           </a:bodyPr>
           <a:lstStyle/>
           <a:p>
-            <a:pPr algn="l">
-              <a:spcBef>
-                <a:spcPts val="0"/>
-              </a:spcBef>
+            <a:pPr>
               <a:spcAft>
                 <a:spcPts val="600"/>
               </a:spcAft>
@@ -4066,7 +3897,7 @@
                 </a:solidFill>
                 <a:latin typeface="Consolas"/>
               </a:rPr>
-              <a:t>03 · THE HONEST GAP — HOW MUCH DOES IT HIDE?</a:t>
+              <a:t>03 · BUT HOW MUCH DOES IT HIDE?</a:t>
             </a:r>
           </a:p>
         </p:txBody>
@@ -4123,8 +3954,8 @@
         </p:nvSpPr>
         <p:spPr>
           <a:xfrm>
-            <a:off x="640080" y="1234440"/>
-            <a:ext cx="10881360" cy="640080"/>
+            <a:off x="822960" y="1737360"/>
+            <a:ext cx="3108960" cy="457200"/>
           </a:xfrm>
           <a:prstGeom prst="rect">
             <a:avLst/>
@@ -4137,58 +3968,13 @@
           </a:bodyPr>
           <a:lstStyle/>
           <a:p>
-            <a:pPr algn="l">
-              <a:spcBef>
-                <a:spcPts val="0"/>
-              </a:spcBef>
+            <a:pPr>
               <a:spcAft>
                 <a:spcPts val="600"/>
               </a:spcAft>
             </a:pPr>
             <a:r>
-              <a:rPr sz="1900" b="1" i="0">
-                <a:solidFill>
-                  <a:srgbClr val="18211E"/>
-                </a:solidFill>
-                <a:latin typeface="Georgia"/>
-              </a:rPr>
-              <a:t>On real medical records, it hides names and dates well — but misses about half of ID numbers and addresses.</a:t>
-            </a:r>
-          </a:p>
-        </p:txBody>
-      </p:sp>
-      <p:sp>
-        <p:nvSpPr>
-          <p:cNvPr id="6" name="TextBox 5"/>
-          <p:cNvSpPr txBox="1"/>
-          <p:nvPr/>
-        </p:nvSpPr>
-        <p:spPr>
-          <a:xfrm>
-            <a:off x="822960" y="2286000"/>
-            <a:ext cx="4206240" cy="365760"/>
-          </a:xfrm>
-          <a:prstGeom prst="rect">
-            <a:avLst/>
-          </a:prstGeom>
-          <a:noFill/>
-        </p:spPr>
-        <p:txBody>
-          <a:bodyPr wrap="square" lIns="0" rIns="0" tIns="0" bIns="0">
-            <a:spAutoFit/>
-          </a:bodyPr>
-          <a:lstStyle/>
-          <a:p>
-            <a:pPr algn="l">
-              <a:spcBef>
-                <a:spcPts val="0"/>
-              </a:spcBef>
-              <a:spcAft>
-                <a:spcPts val="600"/>
-              </a:spcAft>
-            </a:pPr>
-            <a:r>
-              <a:rPr sz="1600" b="1" i="0">
+              <a:rPr sz="2000" b="1" i="0">
                 <a:solidFill>
                   <a:srgbClr val="18211E"/>
                 </a:solidFill>
@@ -4201,14 +3987,14 @@
       </p:sp>
       <p:sp>
         <p:nvSpPr>
-          <p:cNvPr id="7" name="Rectangle 6"/>
+          <p:cNvPr id="6" name="Rectangle 5"/>
           <p:cNvSpPr/>
           <p:nvPr/>
         </p:nvSpPr>
         <p:spPr>
           <a:xfrm>
-            <a:off x="5120640" y="2304288"/>
-            <a:ext cx="4206240" cy="292608"/>
+            <a:off x="4023360" y="1764792"/>
+            <a:ext cx="5120640" cy="384048"/>
           </a:xfrm>
           <a:prstGeom prst="rect">
             <a:avLst/>
@@ -4245,14 +4031,14 @@
       </p:sp>
       <p:sp>
         <p:nvSpPr>
-          <p:cNvPr id="8" name="Rectangle 7"/>
+          <p:cNvPr id="7" name="Rectangle 6"/>
           <p:cNvSpPr/>
           <p:nvPr/>
         </p:nvSpPr>
         <p:spPr>
           <a:xfrm>
-            <a:off x="5120640" y="2304288"/>
-            <a:ext cx="3154679" cy="292608"/>
+            <a:off x="4023360" y="1764792"/>
+            <a:ext cx="3840479" cy="384048"/>
           </a:xfrm>
           <a:prstGeom prst="rect">
             <a:avLst/>
@@ -4289,14 +4075,14 @@
       </p:sp>
       <p:sp>
         <p:nvSpPr>
-          <p:cNvPr id="9" name="TextBox 8"/>
+          <p:cNvPr id="8" name="TextBox 7"/>
           <p:cNvSpPr txBox="1"/>
           <p:nvPr/>
         </p:nvSpPr>
         <p:spPr>
           <a:xfrm>
-            <a:off x="9601200" y="2286000"/>
-            <a:ext cx="2194560" cy="365760"/>
+            <a:off x="9418320" y="1737360"/>
+            <a:ext cx="2194560" cy="457200"/>
           </a:xfrm>
           <a:prstGeom prst="rect">
             <a:avLst/>
@@ -4309,36 +4095,33 @@
           </a:bodyPr>
           <a:lstStyle/>
           <a:p>
-            <a:pPr algn="l">
-              <a:spcBef>
-                <a:spcPts val="0"/>
-              </a:spcBef>
+            <a:pPr>
               <a:spcAft>
                 <a:spcPts val="600"/>
               </a:spcAft>
             </a:pPr>
             <a:r>
-              <a:rPr sz="1400" b="1" i="0">
+              <a:rPr sz="1800" b="1" i="0">
                 <a:solidFill>
                   <a:srgbClr val="0F6E5C"/>
                 </a:solidFill>
                 <a:latin typeface="Consolas"/>
               </a:rPr>
-              <a:t>hides ~3 of 4</a:t>
-            </a:r>
-          </a:p>
-        </p:txBody>
-      </p:sp>
-      <p:sp>
-        <p:nvSpPr>
-          <p:cNvPr id="10" name="TextBox 9"/>
+              <a:t>3 of 4</a:t>
+            </a:r>
+          </a:p>
+        </p:txBody>
+      </p:sp>
+      <p:sp>
+        <p:nvSpPr>
+          <p:cNvPr id="9" name="TextBox 8"/>
           <p:cNvSpPr txBox="1"/>
           <p:nvPr/>
         </p:nvSpPr>
         <p:spPr>
           <a:xfrm>
-            <a:off x="822960" y="3127248"/>
-            <a:ext cx="4206240" cy="365760"/>
+            <a:off x="822960" y="2697480"/>
+            <a:ext cx="3108960" cy="457200"/>
           </a:xfrm>
           <a:prstGeom prst="rect">
             <a:avLst/>
@@ -4351,36 +4134,33 @@
           </a:bodyPr>
           <a:lstStyle/>
           <a:p>
-            <a:pPr algn="l">
-              <a:spcBef>
-                <a:spcPts val="0"/>
-              </a:spcBef>
+            <a:pPr>
               <a:spcAft>
                 <a:spcPts val="600"/>
               </a:spcAft>
             </a:pPr>
             <a:r>
-              <a:rPr sz="1600" b="1" i="0">
+              <a:rPr sz="2000" b="1" i="0">
                 <a:solidFill>
                   <a:srgbClr val="18211E"/>
                 </a:solidFill>
                 <a:latin typeface="Georgia"/>
               </a:rPr>
-              <a:t>Dates / ages</a:t>
-            </a:r>
-          </a:p>
-        </p:txBody>
-      </p:sp>
-      <p:sp>
-        <p:nvSpPr>
-          <p:cNvPr id="11" name="Rectangle 10"/>
+              <a:t>Dates</a:t>
+            </a:r>
+          </a:p>
+        </p:txBody>
+      </p:sp>
+      <p:sp>
+        <p:nvSpPr>
+          <p:cNvPr id="10" name="Rectangle 9"/>
           <p:cNvSpPr/>
           <p:nvPr/>
         </p:nvSpPr>
         <p:spPr>
           <a:xfrm>
-            <a:off x="5120640" y="3145536"/>
-            <a:ext cx="4206240" cy="292608"/>
+            <a:off x="4023360" y="2724912"/>
+            <a:ext cx="5120640" cy="384048"/>
           </a:xfrm>
           <a:prstGeom prst="rect">
             <a:avLst/>
@@ -4417,14 +4197,14 @@
       </p:sp>
       <p:sp>
         <p:nvSpPr>
-          <p:cNvPr id="12" name="Rectangle 11"/>
+          <p:cNvPr id="11" name="Rectangle 10"/>
           <p:cNvSpPr/>
           <p:nvPr/>
         </p:nvSpPr>
         <p:spPr>
           <a:xfrm>
-            <a:off x="5120640" y="3145536"/>
-            <a:ext cx="3070555" cy="292608"/>
+            <a:off x="4023360" y="2724912"/>
+            <a:ext cx="3738067" cy="384048"/>
           </a:xfrm>
           <a:prstGeom prst="rect">
             <a:avLst/>
@@ -4461,14 +4241,14 @@
       </p:sp>
       <p:sp>
         <p:nvSpPr>
-          <p:cNvPr id="13" name="TextBox 12"/>
+          <p:cNvPr id="12" name="TextBox 11"/>
           <p:cNvSpPr txBox="1"/>
           <p:nvPr/>
         </p:nvSpPr>
         <p:spPr>
           <a:xfrm>
-            <a:off x="9601200" y="3127248"/>
-            <a:ext cx="2194560" cy="365760"/>
+            <a:off x="9418320" y="2697480"/>
+            <a:ext cx="2194560" cy="457200"/>
           </a:xfrm>
           <a:prstGeom prst="rect">
             <a:avLst/>
@@ -4481,36 +4261,33 @@
           </a:bodyPr>
           <a:lstStyle/>
           <a:p>
-            <a:pPr algn="l">
-              <a:spcBef>
-                <a:spcPts val="0"/>
-              </a:spcBef>
+            <a:pPr>
               <a:spcAft>
                 <a:spcPts val="600"/>
               </a:spcAft>
             </a:pPr>
             <a:r>
-              <a:rPr sz="1400" b="1" i="0">
+              <a:rPr sz="1800" b="1" i="0">
                 <a:solidFill>
                   <a:srgbClr val="0F6E5C"/>
                 </a:solidFill>
                 <a:latin typeface="Consolas"/>
               </a:rPr>
-              <a:t>hides ~3 of 4</a:t>
-            </a:r>
-          </a:p>
-        </p:txBody>
-      </p:sp>
-      <p:sp>
-        <p:nvSpPr>
-          <p:cNvPr id="14" name="TextBox 13"/>
+              <a:t>3 of 4</a:t>
+            </a:r>
+          </a:p>
+        </p:txBody>
+      </p:sp>
+      <p:sp>
+        <p:nvSpPr>
+          <p:cNvPr id="13" name="TextBox 12"/>
           <p:cNvSpPr txBox="1"/>
           <p:nvPr/>
         </p:nvSpPr>
         <p:spPr>
           <a:xfrm>
-            <a:off x="822960" y="3968496"/>
-            <a:ext cx="4206240" cy="365760"/>
+            <a:off x="822960" y="3657600"/>
+            <a:ext cx="3108960" cy="457200"/>
           </a:xfrm>
           <a:prstGeom prst="rect">
             <a:avLst/>
@@ -4523,36 +4300,33 @@
           </a:bodyPr>
           <a:lstStyle/>
           <a:p>
-            <a:pPr algn="l">
-              <a:spcBef>
-                <a:spcPts val="0"/>
-              </a:spcBef>
+            <a:pPr>
               <a:spcAft>
                 <a:spcPts val="600"/>
               </a:spcAft>
             </a:pPr>
             <a:r>
-              <a:rPr sz="1600" b="1" i="0">
+              <a:rPr sz="2000" b="1" i="0">
                 <a:solidFill>
                   <a:srgbClr val="18211E"/>
                 </a:solidFill>
                 <a:latin typeface="Georgia"/>
               </a:rPr>
-              <a:t>ID numbers (patient ID, phone)</a:t>
-            </a:r>
-          </a:p>
-        </p:txBody>
-      </p:sp>
-      <p:sp>
-        <p:nvSpPr>
-          <p:cNvPr id="15" name="Rectangle 14"/>
+              <a:t>ID numbers</a:t>
+            </a:r>
+          </a:p>
+        </p:txBody>
+      </p:sp>
+      <p:sp>
+        <p:nvSpPr>
+          <p:cNvPr id="14" name="Rectangle 13"/>
           <p:cNvSpPr/>
           <p:nvPr/>
         </p:nvSpPr>
         <p:spPr>
           <a:xfrm>
-            <a:off x="5120640" y="3986784"/>
-            <a:ext cx="4206240" cy="292608"/>
+            <a:off x="4023360" y="3685032"/>
+            <a:ext cx="5120640" cy="384048"/>
           </a:xfrm>
           <a:prstGeom prst="rect">
             <a:avLst/>
@@ -4589,14 +4363,14 @@
       </p:sp>
       <p:sp>
         <p:nvSpPr>
-          <p:cNvPr id="16" name="Rectangle 15"/>
+          <p:cNvPr id="15" name="Rectangle 14"/>
           <p:cNvSpPr/>
           <p:nvPr/>
         </p:nvSpPr>
         <p:spPr>
           <a:xfrm>
-            <a:off x="5120640" y="3986784"/>
-            <a:ext cx="2145182" cy="292608"/>
+            <a:off x="4023360" y="3685032"/>
+            <a:ext cx="2611526" cy="384048"/>
           </a:xfrm>
           <a:prstGeom prst="rect">
             <a:avLst/>
@@ -4633,14 +4407,14 @@
       </p:sp>
       <p:sp>
         <p:nvSpPr>
-          <p:cNvPr id="17" name="TextBox 16"/>
+          <p:cNvPr id="16" name="TextBox 15"/>
           <p:cNvSpPr txBox="1"/>
           <p:nvPr/>
         </p:nvSpPr>
         <p:spPr>
           <a:xfrm>
-            <a:off x="9601200" y="3968496"/>
-            <a:ext cx="2194560" cy="365760"/>
+            <a:off x="9418320" y="3657600"/>
+            <a:ext cx="2194560" cy="457200"/>
           </a:xfrm>
           <a:prstGeom prst="rect">
             <a:avLst/>
@@ -4653,36 +4427,33 @@
           </a:bodyPr>
           <a:lstStyle/>
           <a:p>
-            <a:pPr algn="l">
-              <a:spcBef>
-                <a:spcPts val="0"/>
-              </a:spcBef>
+            <a:pPr>
               <a:spcAft>
                 <a:spcPts val="600"/>
               </a:spcAft>
             </a:pPr>
             <a:r>
-              <a:rPr sz="1400" b="1" i="0">
+              <a:rPr sz="1800" b="1" i="0">
                 <a:solidFill>
                   <a:srgbClr val="BD5B36"/>
                 </a:solidFill>
                 <a:latin typeface="Consolas"/>
               </a:rPr>
-              <a:t>hides ~1 of 2</a:t>
-            </a:r>
-          </a:p>
-        </p:txBody>
-      </p:sp>
-      <p:sp>
-        <p:nvSpPr>
-          <p:cNvPr id="18" name="TextBox 17"/>
+              <a:t>1 of 2</a:t>
+            </a:r>
+          </a:p>
+        </p:txBody>
+      </p:sp>
+      <p:sp>
+        <p:nvSpPr>
+          <p:cNvPr id="17" name="TextBox 16"/>
           <p:cNvSpPr txBox="1"/>
           <p:nvPr/>
         </p:nvSpPr>
         <p:spPr>
           <a:xfrm>
-            <a:off x="822960" y="4809744"/>
-            <a:ext cx="4206240" cy="365760"/>
+            <a:off x="822960" y="4617720"/>
+            <a:ext cx="3108960" cy="457200"/>
           </a:xfrm>
           <a:prstGeom prst="rect">
             <a:avLst/>
@@ -4695,36 +4466,33 @@
           </a:bodyPr>
           <a:lstStyle/>
           <a:p>
-            <a:pPr algn="l">
-              <a:spcBef>
-                <a:spcPts val="0"/>
-              </a:spcBef>
+            <a:pPr>
               <a:spcAft>
                 <a:spcPts val="600"/>
               </a:spcAft>
             </a:pPr>
             <a:r>
-              <a:rPr sz="1600" b="1" i="0">
+              <a:rPr sz="2000" b="1" i="0">
                 <a:solidFill>
                   <a:srgbClr val="18211E"/>
                 </a:solidFill>
                 <a:latin typeface="Georgia"/>
               </a:rPr>
-              <a:t>Addresses / places</a:t>
-            </a:r>
-          </a:p>
-        </p:txBody>
-      </p:sp>
-      <p:sp>
-        <p:nvSpPr>
-          <p:cNvPr id="19" name="Rectangle 18"/>
+              <a:t>Addresses</a:t>
+            </a:r>
+          </a:p>
+        </p:txBody>
+      </p:sp>
+      <p:sp>
+        <p:nvSpPr>
+          <p:cNvPr id="18" name="Rectangle 17"/>
           <p:cNvSpPr/>
           <p:nvPr/>
         </p:nvSpPr>
         <p:spPr>
           <a:xfrm>
-            <a:off x="5120640" y="4828032"/>
-            <a:ext cx="4206240" cy="292608"/>
+            <a:off x="4023360" y="4645152"/>
+            <a:ext cx="5120640" cy="384048"/>
           </a:xfrm>
           <a:prstGeom prst="rect">
             <a:avLst/>
@@ -4761,14 +4529,14 @@
       </p:sp>
       <p:sp>
         <p:nvSpPr>
-          <p:cNvPr id="20" name="Rectangle 19"/>
+          <p:cNvPr id="19" name="Rectangle 18"/>
           <p:cNvSpPr/>
           <p:nvPr/>
         </p:nvSpPr>
         <p:spPr>
           <a:xfrm>
-            <a:off x="5120640" y="4828032"/>
-            <a:ext cx="1850745" cy="292608"/>
+            <a:off x="4023360" y="4645152"/>
+            <a:ext cx="2253081" cy="384048"/>
           </a:xfrm>
           <a:prstGeom prst="rect">
             <a:avLst/>
@@ -4805,14 +4573,14 @@
       </p:sp>
       <p:sp>
         <p:nvSpPr>
-          <p:cNvPr id="21" name="TextBox 20"/>
+          <p:cNvPr id="20" name="TextBox 19"/>
           <p:cNvSpPr txBox="1"/>
           <p:nvPr/>
         </p:nvSpPr>
         <p:spPr>
           <a:xfrm>
-            <a:off x="9601200" y="4809744"/>
-            <a:ext cx="2194560" cy="365760"/>
+            <a:off x="9418320" y="4617720"/>
+            <a:ext cx="2194560" cy="457200"/>
           </a:xfrm>
           <a:prstGeom prst="rect">
             <a:avLst/>
@@ -4825,22 +4593,19 @@
           </a:bodyPr>
           <a:lstStyle/>
           <a:p>
-            <a:pPr algn="l">
-              <a:spcBef>
-                <a:spcPts val="0"/>
-              </a:spcBef>
+            <a:pPr>
               <a:spcAft>
                 <a:spcPts val="600"/>
               </a:spcAft>
             </a:pPr>
             <a:r>
-              <a:rPr sz="1400" b="1" i="0">
+              <a:rPr sz="1800" b="1" i="0">
                 <a:solidFill>
                   <a:srgbClr val="BD5B36"/>
                 </a:solidFill>
                 <a:latin typeface="Consolas"/>
               </a:rPr>
-              <a:t>hides ~1 of 2</a:t>
+              <a:t>1 of 2</a:t>
             </a:r>
           </a:p>
         </p:txBody>
@@ -4929,10 +4694,7 @@
           </a:bodyPr>
           <a:lstStyle/>
           <a:p>
-            <a:pPr algn="l">
-              <a:spcBef>
-                <a:spcPts val="0"/>
-              </a:spcBef>
+            <a:pPr>
               <a:spcAft>
                 <a:spcPts val="600"/>
               </a:spcAft>
@@ -4944,7 +4706,7 @@
                 </a:solidFill>
                 <a:latin typeface="Consolas"/>
               </a:rPr>
-              <a:t>04 · THE GOOD NEWS ABOUT THE GAP</a:t>
+              <a:t>04 · THE GAP IS FIXABLE</a:t>
             </a:r>
           </a:p>
         </p:txBody>
@@ -5001,8 +4763,8 @@
         </p:nvSpPr>
         <p:spPr>
           <a:xfrm>
-            <a:off x="640080" y="1828800"/>
-            <a:ext cx="4937760" cy="2743200"/>
+            <a:off x="640080" y="2103120"/>
+            <a:ext cx="5486400" cy="1828800"/>
           </a:xfrm>
           <a:prstGeom prst="rect">
             <a:avLst/>
@@ -5015,121 +4777,138 @@
           </a:bodyPr>
           <a:lstStyle/>
           <a:p>
-            <a:pPr algn="l">
-              <a:spcBef>
-                <a:spcPts val="0"/>
-              </a:spcBef>
+            <a:pPr>
+              <a:spcAft>
+                <a:spcPts val="600"/>
+              </a:spcAft>
+            </a:pPr>
+            <a:r>
+              <a:rPr sz="9000" b="1" i="0">
+                <a:solidFill>
+                  <a:srgbClr val="0F6E5C"/>
+                </a:solidFill>
+                <a:latin typeface="Consolas"/>
+              </a:rPr>
+              <a:t>~3 in 4</a:t>
+            </a:r>
+          </a:p>
+          <a:p>
+            <a:pPr>
+              <a:spcAft>
+                <a:spcPts val="600"/>
+              </a:spcAft>
+            </a:pPr>
+            <a:r>
+              <a:rPr sz="1700" b="0" i="0">
+                <a:solidFill>
+                  <a:srgbClr val="5C6B64"/>
+                </a:solidFill>
+                <a:latin typeface="Georgia"/>
+              </a:rPr>
+              <a:t>misses were already detected — just not swapped</a:t>
+            </a:r>
+          </a:p>
+        </p:txBody>
+      </p:sp>
+      <p:sp>
+        <p:nvSpPr>
+          <p:cNvPr id="6" name="TextBox 5"/>
+          <p:cNvSpPr txBox="1"/>
+          <p:nvPr/>
+        </p:nvSpPr>
+        <p:spPr>
+          <a:xfrm>
+            <a:off x="6766560" y="2194560"/>
+            <a:ext cx="4846320" cy="2377440"/>
+          </a:xfrm>
+          <a:prstGeom prst="rect">
+            <a:avLst/>
+          </a:prstGeom>
+          <a:noFill/>
+        </p:spPr>
+        <p:txBody>
+          <a:bodyPr wrap="square" lIns="0" rIns="0" tIns="0" bIns="0">
+            <a:spAutoFit/>
+          </a:bodyPr>
+          <a:lstStyle/>
+          <a:p>
+            <a:pPr>
               <a:spcAft>
                 <a:spcPts val="800"/>
               </a:spcAft>
             </a:pPr>
             <a:r>
-              <a:rPr sz="7800" b="1" i="0">
-                <a:solidFill>
-                  <a:srgbClr val="0F6E5C"/>
+              <a:rPr sz="1700" b="1" i="0">
+                <a:solidFill>
+                  <a:srgbClr val="18211E"/>
+                </a:solidFill>
+                <a:latin typeface="Georgia"/>
+              </a:rPr>
+              <a:t>Broken surrogates miss:</a:t>
+            </a:r>
+          </a:p>
+          <a:p>
+            <a:pPr>
+              <a:spcAft>
+                <a:spcPts val="400"/>
+              </a:spcAft>
+            </a:pPr>
+            <a:r>
+              <a:rPr sz="1500" b="0" i="0">
+                <a:solidFill>
+                  <a:srgbClr val="BD5B36"/>
                 </a:solidFill>
                 <a:latin typeface="Consolas"/>
               </a:rPr>
-              <a:t>~3 in 4</a:t>
-            </a:r>
-          </a:p>
-          <a:p>
-            <a:pPr algn="l">
-              <a:spcBef>
-                <a:spcPts val="0"/>
-              </a:spcBef>
+              <a:t>Chicago → Illino</a:t>
+            </a:r>
+          </a:p>
+          <a:p>
+            <a:pPr>
+              <a:spcAft>
+                <a:spcPts val="400"/>
+              </a:spcAft>
+            </a:pPr>
+            <a:r>
+              <a:rPr sz="1500" b="0" i="0">
+                <a:solidFill>
+                  <a:srgbClr val="BD5B36"/>
+                </a:solidFill>
+                <a:latin typeface="Consolas"/>
+              </a:rPr>
+              <a:t>El Paso → El</a:t>
+            </a:r>
+          </a:p>
+          <a:p>
+            <a:pPr>
+              <a:spcAft>
+                <a:spcPts val="800"/>
+              </a:spcAft>
+            </a:pPr>
+            <a:r>
+              <a:rPr sz="1500" b="0" i="0">
+                <a:solidFill>
+                  <a:srgbClr val="BD5B36"/>
+                </a:solidFill>
+                <a:latin typeface="Consolas"/>
+              </a:rPr>
+              <a:t>Cedars-Sinai → Vidant</a:t>
+            </a:r>
+          </a:p>
+          <a:p>
+            <a:pPr>
               <a:spcAft>
                 <a:spcPts val="600"/>
               </a:spcAft>
             </a:pPr>
             <a:r>
-              <a:rPr sz="1200" b="1" i="0">
+              <a:rPr sz="1500" b="0" i="0">
                 <a:solidFill>
                   <a:srgbClr val="5C6B64"/>
-                </a:solidFill>
-                <a:latin typeface="Consolas"/>
-              </a:rPr>
-              <a:t>OF THE MISSES, THE TOOL ALREADY KNEW IT WAS PRIVATE</a:t>
-            </a:r>
-          </a:p>
-        </p:txBody>
-      </p:sp>
-      <p:sp>
-        <p:nvSpPr>
-          <p:cNvPr id="6" name="TextBox 5"/>
-          <p:cNvSpPr txBox="1"/>
-          <p:nvPr/>
-        </p:nvSpPr>
-        <p:spPr>
-          <a:xfrm>
-            <a:off x="5852160" y="1920240"/>
-            <a:ext cx="5669280" cy="2926080"/>
-          </a:xfrm>
-          <a:prstGeom prst="rect">
-            <a:avLst/>
-          </a:prstGeom>
-          <a:noFill/>
-        </p:spPr>
-        <p:txBody>
-          <a:bodyPr wrap="square" lIns="0" rIns="0" tIns="0" bIns="0">
-            <a:spAutoFit/>
-          </a:bodyPr>
-          <a:lstStyle/>
-          <a:p>
-            <a:pPr algn="l">
-              <a:spcBef>
-                <a:spcPts val="0"/>
-              </a:spcBef>
-              <a:spcAft>
-                <a:spcPts val="1400"/>
-              </a:spcAft>
-            </a:pPr>
-            <a:r>
-              <a:rPr sz="2400" b="1" i="0">
-                <a:solidFill>
-                  <a:srgbClr val="18211E"/>
                 </a:solidFill>
                 <a:latin typeface="Georgia"/>
               </a:rPr>
-              <a:t>It's a swapping gap, not a finding gap.</a:t>
-            </a:r>
-          </a:p>
-          <a:p>
-            <a:pPr algn="l">
-              <a:spcBef>
-                <a:spcPts val="0"/>
-              </a:spcBef>
-              <a:spcAft>
-                <a:spcPts val="1000"/>
-              </a:spcAft>
-            </a:pPr>
-            <a:r>
-              <a:rPr sz="1800" b="0" i="0">
-                <a:solidFill>
-                  <a:srgbClr val="18211E"/>
-                </a:solidFill>
-                <a:latin typeface="Georgia"/>
-              </a:rPr>
-              <a:t>For most of what slips through, the tool had already flagged it as sensitive — it just didn't swap it. So the fix is in the swap step, not in teaching it what's private.</a:t>
-            </a:r>
-          </a:p>
-          <a:p>
-            <a:pPr algn="l">
-              <a:spcBef>
-                <a:spcPts val="0"/>
-              </a:spcBef>
-              <a:spcAft>
-                <a:spcPts val="600"/>
-              </a:spcAft>
-            </a:pPr>
-            <a:r>
-              <a:rPr sz="1500" b="0" i="0">
-                <a:solidFill>
-                  <a:srgbClr val="5C6B64"/>
-                </a:solidFill>
-                <a:latin typeface="Georgia"/>
-              </a:rPr>
-              <a:t>That's the easier kind of problem to fix.</a:t>
+              <a:t>Fix the swap step, not the detector.</a:t>
             </a:r>
           </a:p>
         </p:txBody>
@@ -5204,8 +4983,8 @@
         </p:nvSpPr>
         <p:spPr>
           <a:xfrm>
-            <a:off x="822960" y="1920240"/>
-            <a:ext cx="10515600" cy="3108960"/>
+            <a:off x="822960" y="2194560"/>
+            <a:ext cx="10515600" cy="2743200"/>
           </a:xfrm>
           <a:prstGeom prst="rect">
             <a:avLst/>
@@ -5218,50 +4997,41 @@
           </a:bodyPr>
           <a:lstStyle/>
           <a:p>
-            <a:pPr algn="l">
-              <a:spcBef>
-                <a:spcPts val="0"/>
-              </a:spcBef>
+            <a:pPr>
               <a:spcAft>
-                <a:spcPts val="1400"/>
+                <a:spcPts val="2000"/>
               </a:spcAft>
             </a:pPr>
             <a:r>
-              <a:rPr sz="1300" b="1" i="0">
-                <a:solidFill>
-                  <a:srgbClr val="0F6E5C"/>
-                </a:solidFill>
-                <a:latin typeface="Consolas"/>
+              <a:rPr sz="3200" b="1" i="0">
+                <a:solidFill>
+                  <a:srgbClr val="FFFFFF"/>
+                </a:solidFill>
+                <a:latin typeface="Georgia"/>
               </a:rPr>
-              <a:t>Bottom line</a:t>
-            </a:r>
-          </a:p>
-          <a:p>
-            <a:pPr algn="l">
-              <a:spcBef>
-                <a:spcPts val="0"/>
-              </a:spcBef>
+              <a:t>Usable: proven. Hide more: next.</a:t>
+            </a:r>
+          </a:p>
+          <a:p>
+            <a:pPr>
               <a:spcAft>
-                <a:spcPts val="1800"/>
+                <a:spcPts val="1000"/>
               </a:spcAft>
             </a:pPr>
             <a:r>
-              <a:rPr sz="3000" b="1" i="0">
-                <a:solidFill>
-                  <a:srgbClr val="FFFFFF"/>
+              <a:rPr sz="1800" b="0" i="0">
+                <a:solidFill>
+                  <a:srgbClr val="C5CDC8"/>
                 </a:solidFill>
                 <a:latin typeface="Georgia"/>
               </a:rPr>
-              <a:t>Great at keeping data usable. Next: hide more completely.</a:t>
-            </a:r>
-          </a:p>
-          <a:p>
-            <a:pPr algn="l">
-              <a:spcBef>
-                <a:spcPts val="0"/>
-              </a:spcBef>
+              <a:t>✓  Swap doesn’t break data — equivalent within ±2 pts</a:t>
+            </a:r>
+          </a:p>
+          <a:p>
+            <a:pPr>
               <a:spcAft>
-                <a:spcPts val="800"/>
+                <a:spcPts val="1000"/>
               </a:spcAft>
             </a:pPr>
             <a:r>
@@ -5271,33 +5041,11 @@
                 </a:solidFill>
                 <a:latin typeface="Georgia"/>
               </a:rPr>
-              <a:t>• The swap doesn't break anything — that's ready to show clients.</a:t>
-            </a:r>
-          </a:p>
-          <a:p>
-            <a:pPr algn="l">
-              <a:spcBef>
-                <a:spcPts val="0"/>
-              </a:spcBef>
-              <a:spcAft>
-                <a:spcPts val="800"/>
-              </a:spcAft>
-            </a:pPr>
-            <a:r>
-              <a:rPr sz="1800" b="0" i="0">
-                <a:solidFill>
-                  <a:srgbClr val="C5CDC8"/>
-                </a:solidFill>
-                <a:latin typeface="Georgia"/>
-              </a:rPr>
-              <a:t>• It hides names and dates well, but misses ~half of ID numbers and addresses.</a:t>
-            </a:r>
-          </a:p>
-          <a:p>
-            <a:pPr algn="l">
-              <a:spcBef>
-                <a:spcPts val="0"/>
-              </a:spcBef>
+              <a:t>✓  Hides names/dates well; misses ~half of IDs &amp; addresses</a:t>
+            </a:r>
+          </a:p>
+          <a:p>
+            <a:pPr>
               <a:spcAft>
                 <a:spcPts val="600"/>
               </a:spcAft>
@@ -5309,7 +5057,7 @@
                 </a:solidFill>
                 <a:latin typeface="Georgia"/>
               </a:rPr>
-              <a:t>• Most misses are already detected — fixing the swap step should close the gap.</a:t>
+              <a:t>✓  Most misses already detected — fixable in the swap step</a:t>
             </a:r>
           </a:p>
         </p:txBody>
@@ -5336,10 +5084,7 @@
           </a:bodyPr>
           <a:lstStyle/>
           <a:p>
-            <a:pPr algn="l">
-              <a:spcBef>
-                <a:spcPts val="0"/>
-              </a:spcBef>
+            <a:pPr>
               <a:spcAft>
                 <a:spcPts val="600"/>
               </a:spcAft>
@@ -5351,7 +5096,7 @@
                 </a:solidFill>
                 <a:latin typeface="Consolas"/>
               </a:rPr>
-              <a:t>Full data → custodianai.pages.dev</a:t>
+              <a:t>custodianai.pages.dev</a:t>
             </a:r>
           </a:p>
         </p:txBody>
